--- a/latex/lec5/report_2412747_5.pptx
+++ b/latex/lec5/report_2412747_5.pptx
@@ -11,6 +11,12 @@
     <p:sldId id="260" r:id="rId5"/>
     <p:sldId id="261" r:id="rId6"/>
     <p:sldId id="262" r:id="rId7"/>
+    <p:sldId id="263" r:id="rId8"/>
+    <p:sldId id="264" r:id="rId9"/>
+    <p:sldId id="265" r:id="rId10"/>
+    <p:sldId id="266" r:id="rId11"/>
+    <p:sldId id="267" r:id="rId12"/>
+    <p:sldId id="268" r:id="rId13"/>
   </p:sldIdLst>
   <p:sldSz cx="12192000" cy="6858000"/>
   <p:notesSz cx="6858000" cy="9144000"/>
@@ -109,6 +115,11 @@
       </a:defRPr>
     </a:lvl9pPr>
   </p:defaultTextStyle>
+  <p:extLst>
+    <p:ext uri="{EFAFB233-063F-42B5-8137-9DF3F51BA10A}">
+      <p15:sldGuideLst xmlns:p15="http://schemas.microsoft.com/office/powerpoint/2012/main"/>
+    </p:ext>
+  </p:extLst>
 </p:presentation>
 </file>
 
@@ -259,7 +270,7 @@
           <a:p>
             <a:fld id="{8AE69D1F-A7D1-C145-9DA5-1F881D0B5FF8}" type="datetimeFigureOut">
               <a:rPr kumimoji="1" lang="ja-JP" altLang="en-US" smtClean="0"/>
-              <a:t>2026/5/8</a:t>
+              <a:t>2026/5/9</a:t>
             </a:fld>
             <a:endParaRPr kumimoji="1" lang="ja-JP" altLang="en-US"/>
           </a:p>
@@ -489,7 +500,7 @@
           <a:p>
             <a:fld id="{8AE69D1F-A7D1-C145-9DA5-1F881D0B5FF8}" type="datetimeFigureOut">
               <a:rPr kumimoji="1" lang="ja-JP" altLang="en-US" smtClean="0"/>
-              <a:t>2026/5/8</a:t>
+              <a:t>2026/5/9</a:t>
             </a:fld>
             <a:endParaRPr kumimoji="1" lang="ja-JP" altLang="en-US"/>
           </a:p>
@@ -729,7 +740,7 @@
           <a:p>
             <a:fld id="{8AE69D1F-A7D1-C145-9DA5-1F881D0B5FF8}" type="datetimeFigureOut">
               <a:rPr kumimoji="1" lang="ja-JP" altLang="en-US" smtClean="0"/>
-              <a:t>2026/5/8</a:t>
+              <a:t>2026/5/9</a:t>
             </a:fld>
             <a:endParaRPr kumimoji="1" lang="ja-JP" altLang="en-US"/>
           </a:p>
@@ -959,7 +970,7 @@
           <a:p>
             <a:fld id="{8AE69D1F-A7D1-C145-9DA5-1F881D0B5FF8}" type="datetimeFigureOut">
               <a:rPr kumimoji="1" lang="ja-JP" altLang="en-US" smtClean="0"/>
-              <a:t>2026/5/8</a:t>
+              <a:t>2026/5/9</a:t>
             </a:fld>
             <a:endParaRPr kumimoji="1" lang="ja-JP" altLang="en-US"/>
           </a:p>
@@ -1234,7 +1245,7 @@
           <a:p>
             <a:fld id="{8AE69D1F-A7D1-C145-9DA5-1F881D0B5FF8}" type="datetimeFigureOut">
               <a:rPr kumimoji="1" lang="ja-JP" altLang="en-US" smtClean="0"/>
-              <a:t>2026/5/8</a:t>
+              <a:t>2026/5/9</a:t>
             </a:fld>
             <a:endParaRPr kumimoji="1" lang="ja-JP" altLang="en-US"/>
           </a:p>
@@ -1563,7 +1574,7 @@
           <a:p>
             <a:fld id="{8AE69D1F-A7D1-C145-9DA5-1F881D0B5FF8}" type="datetimeFigureOut">
               <a:rPr kumimoji="1" lang="ja-JP" altLang="en-US" smtClean="0"/>
-              <a:t>2026/5/8</a:t>
+              <a:t>2026/5/9</a:t>
             </a:fld>
             <a:endParaRPr kumimoji="1" lang="ja-JP" altLang="en-US"/>
           </a:p>
@@ -2039,7 +2050,7 @@
           <a:p>
             <a:fld id="{8AE69D1F-A7D1-C145-9DA5-1F881D0B5FF8}" type="datetimeFigureOut">
               <a:rPr kumimoji="1" lang="ja-JP" altLang="en-US" smtClean="0"/>
-              <a:t>2026/5/8</a:t>
+              <a:t>2026/5/9</a:t>
             </a:fld>
             <a:endParaRPr kumimoji="1" lang="ja-JP" altLang="en-US"/>
           </a:p>
@@ -2180,7 +2191,7 @@
           <a:p>
             <a:fld id="{8AE69D1F-A7D1-C145-9DA5-1F881D0B5FF8}" type="datetimeFigureOut">
               <a:rPr kumimoji="1" lang="ja-JP" altLang="en-US" smtClean="0"/>
-              <a:t>2026/5/8</a:t>
+              <a:t>2026/5/9</a:t>
             </a:fld>
             <a:endParaRPr kumimoji="1" lang="ja-JP" altLang="en-US"/>
           </a:p>
@@ -2293,7 +2304,7 @@
           <a:p>
             <a:fld id="{8AE69D1F-A7D1-C145-9DA5-1F881D0B5FF8}" type="datetimeFigureOut">
               <a:rPr kumimoji="1" lang="ja-JP" altLang="en-US" smtClean="0"/>
-              <a:t>2026/5/8</a:t>
+              <a:t>2026/5/9</a:t>
             </a:fld>
             <a:endParaRPr kumimoji="1" lang="ja-JP" altLang="en-US"/>
           </a:p>
@@ -2636,7 +2647,7 @@
           <a:p>
             <a:fld id="{8AE69D1F-A7D1-C145-9DA5-1F881D0B5FF8}" type="datetimeFigureOut">
               <a:rPr kumimoji="1" lang="ja-JP" altLang="en-US" smtClean="0"/>
-              <a:t>2026/5/8</a:t>
+              <a:t>2026/5/9</a:t>
             </a:fld>
             <a:endParaRPr kumimoji="1" lang="ja-JP" altLang="en-US"/>
           </a:p>
@@ -2924,7 +2935,7 @@
           <a:p>
             <a:fld id="{8AE69D1F-A7D1-C145-9DA5-1F881D0B5FF8}" type="datetimeFigureOut">
               <a:rPr kumimoji="1" lang="ja-JP" altLang="en-US" smtClean="0"/>
-              <a:t>2026/5/8</a:t>
+              <a:t>2026/5/9</a:t>
             </a:fld>
             <a:endParaRPr kumimoji="1" lang="ja-JP" altLang="en-US"/>
           </a:p>
@@ -3197,7 +3208,7 @@
           <a:p>
             <a:fld id="{8AE69D1F-A7D1-C145-9DA5-1F881D0B5FF8}" type="datetimeFigureOut">
               <a:rPr kumimoji="1" lang="ja-JP" altLang="en-US" smtClean="0"/>
-              <a:t>2026/5/8</a:t>
+              <a:t>2026/5/9</a:t>
             </a:fld>
             <a:endParaRPr kumimoji="1" lang="ja-JP" altLang="en-US"/>
           </a:p>
@@ -3614,10 +3625,1849 @@
           <a:chExt cx="0" cy="0"/>
         </a:xfrm>
       </p:grpSpPr>
+      <p:pic>
+        <p:nvPicPr>
+          <p:cNvPr id="3" name="図 2">
+            <a:extLst>
+              <a:ext uri="{FF2B5EF4-FFF2-40B4-BE49-F238E27FC236}">
+                <a16:creationId xmlns:a16="http://schemas.microsoft.com/office/drawing/2014/main" id="{43332975-F6EF-A810-099A-EECDCE28663B}"/>
+              </a:ext>
+            </a:extLst>
+          </p:cNvPr>
+          <p:cNvPicPr>
+            <a:picLocks noChangeAspect="1"/>
+          </p:cNvPicPr>
+          <p:nvPr/>
+        </p:nvPicPr>
+        <p:blipFill>
+          <a:blip r:embed="rId2"/>
+          <a:stretch>
+            <a:fillRect/>
+          </a:stretch>
+        </p:blipFill>
+        <p:spPr>
+          <a:xfrm>
+            <a:off x="4197350" y="2571750"/>
+            <a:ext cx="3797300" cy="1714500"/>
+          </a:xfrm>
+          <a:prstGeom prst="rect">
+            <a:avLst/>
+          </a:prstGeom>
+        </p:spPr>
+      </p:pic>
+      <p:sp>
+        <p:nvSpPr>
+          <p:cNvPr id="4" name="テキスト ボックス 3">
+            <a:extLst>
+              <a:ext uri="{FF2B5EF4-FFF2-40B4-BE49-F238E27FC236}">
+                <a16:creationId xmlns:a16="http://schemas.microsoft.com/office/drawing/2014/main" id="{E9BF81F4-E0B8-4A65-1CF2-0D9026ED0C9A}"/>
+              </a:ext>
+            </a:extLst>
+          </p:cNvPr>
+          <p:cNvSpPr txBox="1"/>
+          <p:nvPr/>
+        </p:nvSpPr>
+        <p:spPr>
+          <a:xfrm>
+            <a:off x="4836681" y="4286250"/>
+            <a:ext cx="2518638" cy="369332"/>
+          </a:xfrm>
+          <a:prstGeom prst="rect">
+            <a:avLst/>
+          </a:prstGeom>
+          <a:noFill/>
+        </p:spPr>
+        <p:txBody>
+          <a:bodyPr wrap="none" rtlCol="0">
+            <a:spAutoFit/>
+          </a:bodyPr>
+          <a:lstStyle/>
+          <a:p>
+            <a:r>
+              <a:rPr kumimoji="1" lang="ja-JP" altLang="en-US"/>
+              <a:t>図</a:t>
+            </a:r>
+            <a:r>
+              <a:rPr kumimoji="1" lang="en-US" altLang="ja-JP" dirty="0"/>
+              <a:t>1</a:t>
+            </a:r>
+            <a:r>
+              <a:rPr kumimoji="1" lang="ja-JP" altLang="en-US"/>
+              <a:t>　</a:t>
+            </a:r>
+            <a:r>
+              <a:rPr kumimoji="1" lang="en-US" altLang="ja-JP" dirty="0"/>
+              <a:t>1</a:t>
+            </a:r>
+            <a:r>
+              <a:rPr kumimoji="1" lang="ja-JP" altLang="en-US"/>
+              <a:t>問目の実行結果</a:t>
+            </a:r>
+          </a:p>
+        </p:txBody>
+      </p:sp>
     </p:spTree>
     <p:extLst>
       <p:ext uri="{BB962C8B-B14F-4D97-AF65-F5344CB8AC3E}">
         <p14:creationId xmlns:p14="http://schemas.microsoft.com/office/powerpoint/2010/main" val="1887378186"/>
+      </p:ext>
+    </p:extLst>
+  </p:cSld>
+  <p:clrMapOvr>
+    <a:masterClrMapping/>
+  </p:clrMapOvr>
+</p:sld>
+</file>
+
+<file path=ppt/slides/slide10.xml><?xml version="1.0" encoding="utf-8"?>
+<p:sld xmlns:a="http://schemas.openxmlformats.org/drawingml/2006/main" xmlns:r="http://schemas.openxmlformats.org/officeDocument/2006/relationships" xmlns:p="http://schemas.openxmlformats.org/presentationml/2006/main">
+  <p:cSld>
+    <p:spTree>
+      <p:nvGrpSpPr>
+        <p:cNvPr id="1" name=""/>
+        <p:cNvGrpSpPr/>
+        <p:nvPr/>
+      </p:nvGrpSpPr>
+      <p:grpSpPr>
+        <a:xfrm>
+          <a:off x="0" y="0"/>
+          <a:ext cx="0" cy="0"/>
+          <a:chOff x="0" y="0"/>
+          <a:chExt cx="0" cy="0"/>
+        </a:xfrm>
+      </p:grpSpPr>
+    </p:spTree>
+    <p:extLst>
+      <p:ext uri="{BB962C8B-B14F-4D97-AF65-F5344CB8AC3E}">
+        <p14:creationId xmlns:p14="http://schemas.microsoft.com/office/powerpoint/2010/main" val="510418290"/>
+      </p:ext>
+    </p:extLst>
+  </p:cSld>
+  <p:clrMapOvr>
+    <a:masterClrMapping/>
+  </p:clrMapOvr>
+</p:sld>
+</file>
+
+<file path=ppt/slides/slide11.xml><?xml version="1.0" encoding="utf-8"?>
+<p:sld xmlns:a="http://schemas.openxmlformats.org/drawingml/2006/main" xmlns:r="http://schemas.openxmlformats.org/officeDocument/2006/relationships" xmlns:p="http://schemas.openxmlformats.org/presentationml/2006/main">
+  <p:cSld>
+    <p:spTree>
+      <p:nvGrpSpPr>
+        <p:cNvPr id="1" name=""/>
+        <p:cNvGrpSpPr/>
+        <p:nvPr/>
+      </p:nvGrpSpPr>
+      <p:grpSpPr>
+        <a:xfrm>
+          <a:off x="0" y="0"/>
+          <a:ext cx="0" cy="0"/>
+          <a:chOff x="0" y="0"/>
+          <a:chExt cx="0" cy="0"/>
+        </a:xfrm>
+      </p:grpSpPr>
+      <p:pic>
+        <p:nvPicPr>
+          <p:cNvPr id="3" name="図 2">
+            <a:extLst>
+              <a:ext uri="{FF2B5EF4-FFF2-40B4-BE49-F238E27FC236}">
+                <a16:creationId xmlns:a16="http://schemas.microsoft.com/office/drawing/2014/main" id="{0573E7E4-2B94-6CD3-4701-291561FB14CB}"/>
+              </a:ext>
+            </a:extLst>
+          </p:cNvPr>
+          <p:cNvPicPr>
+            <a:picLocks noChangeAspect="1"/>
+          </p:cNvPicPr>
+          <p:nvPr/>
+        </p:nvPicPr>
+        <p:blipFill>
+          <a:blip r:embed="rId2"/>
+          <a:stretch>
+            <a:fillRect/>
+          </a:stretch>
+        </p:blipFill>
+        <p:spPr>
+          <a:xfrm>
+            <a:off x="2774950" y="1017484"/>
+            <a:ext cx="6642100" cy="4823032"/>
+          </a:xfrm>
+          <a:prstGeom prst="rect">
+            <a:avLst/>
+          </a:prstGeom>
+        </p:spPr>
+      </p:pic>
+      <p:sp>
+        <p:nvSpPr>
+          <p:cNvPr id="4" name="テキスト ボックス 3">
+            <a:extLst>
+              <a:ext uri="{FF2B5EF4-FFF2-40B4-BE49-F238E27FC236}">
+                <a16:creationId xmlns:a16="http://schemas.microsoft.com/office/drawing/2014/main" id="{10F9A395-6DD8-F1DE-E3F0-7751220E573B}"/>
+              </a:ext>
+            </a:extLst>
+          </p:cNvPr>
+          <p:cNvSpPr txBox="1"/>
+          <p:nvPr/>
+        </p:nvSpPr>
+        <p:spPr>
+          <a:xfrm>
+            <a:off x="3753051" y="6025182"/>
+            <a:ext cx="4685898" cy="369332"/>
+          </a:xfrm>
+          <a:prstGeom prst="rect">
+            <a:avLst/>
+          </a:prstGeom>
+          <a:noFill/>
+        </p:spPr>
+        <p:txBody>
+          <a:bodyPr wrap="none" rtlCol="0">
+            <a:spAutoFit/>
+          </a:bodyPr>
+          <a:lstStyle/>
+          <a:p>
+            <a:r>
+              <a:rPr kumimoji="1" lang="ja-JP" altLang="en-US"/>
+              <a:t>図</a:t>
+            </a:r>
+            <a:r>
+              <a:rPr kumimoji="1" lang="en-US" altLang="ja-JP" dirty="0"/>
+              <a:t>4-2-1</a:t>
+            </a:r>
+            <a:r>
+              <a:rPr kumimoji="1" lang="ja-JP" altLang="en-US"/>
+              <a:t>　</a:t>
+            </a:r>
+            <a:r>
+              <a:rPr kumimoji="1" lang="en-US" altLang="ja-JP" dirty="0"/>
+              <a:t>RBF</a:t>
+            </a:r>
+            <a:r>
+              <a:rPr kumimoji="1" lang="ja-JP" altLang="en-US"/>
+              <a:t>カーネルの実行結果のグラフ</a:t>
+            </a:r>
+          </a:p>
+        </p:txBody>
+      </p:sp>
+      <p:sp>
+        <p:nvSpPr>
+          <p:cNvPr id="5" name="テキスト ボックス 4">
+            <a:extLst>
+              <a:ext uri="{FF2B5EF4-FFF2-40B4-BE49-F238E27FC236}">
+                <a16:creationId xmlns:a16="http://schemas.microsoft.com/office/drawing/2014/main" id="{826C3CA4-018B-3E39-BF6D-DF27628EC785}"/>
+              </a:ext>
+            </a:extLst>
+          </p:cNvPr>
+          <p:cNvSpPr txBox="1"/>
+          <p:nvPr/>
+        </p:nvSpPr>
+        <p:spPr>
+          <a:xfrm>
+            <a:off x="5925120" y="5655850"/>
+            <a:ext cx="341760" cy="369332"/>
+          </a:xfrm>
+          <a:prstGeom prst="rect">
+            <a:avLst/>
+          </a:prstGeom>
+          <a:noFill/>
+        </p:spPr>
+        <p:txBody>
+          <a:bodyPr wrap="none" rtlCol="0">
+            <a:spAutoFit/>
+          </a:bodyPr>
+          <a:lstStyle/>
+          <a:p>
+            <a:r>
+              <a:rPr kumimoji="1" lang="en-US" altLang="ja-JP" dirty="0"/>
+              <a:t>C</a:t>
+            </a:r>
+            <a:endParaRPr kumimoji="1" lang="ja-JP" altLang="en-US"/>
+          </a:p>
+        </p:txBody>
+      </p:sp>
+      <p:sp>
+        <p:nvSpPr>
+          <p:cNvPr id="6" name="テキスト ボックス 5">
+            <a:extLst>
+              <a:ext uri="{FF2B5EF4-FFF2-40B4-BE49-F238E27FC236}">
+                <a16:creationId xmlns:a16="http://schemas.microsoft.com/office/drawing/2014/main" id="{6A4A8871-E9A7-0CA8-CCA3-0FBB71F48372}"/>
+              </a:ext>
+            </a:extLst>
+          </p:cNvPr>
+          <p:cNvSpPr txBox="1"/>
+          <p:nvPr/>
+        </p:nvSpPr>
+        <p:spPr>
+          <a:xfrm rot="16200000">
+            <a:off x="2154428" y="3244334"/>
+            <a:ext cx="1241045" cy="369332"/>
+          </a:xfrm>
+          <a:prstGeom prst="rect">
+            <a:avLst/>
+          </a:prstGeom>
+          <a:noFill/>
+        </p:spPr>
+        <p:txBody>
+          <a:bodyPr wrap="none" rtlCol="0">
+            <a:spAutoFit/>
+          </a:bodyPr>
+          <a:lstStyle/>
+          <a:p>
+            <a:r>
+              <a:rPr kumimoji="1" lang="ja-JP" altLang="en-US"/>
+              <a:t>正解率</a:t>
+            </a:r>
+            <a:r>
+              <a:rPr lang="en-US" altLang="ja-JP" dirty="0"/>
+              <a:t>(%)</a:t>
+            </a:r>
+            <a:endParaRPr kumimoji="1" lang="ja-JP" altLang="en-US"/>
+          </a:p>
+        </p:txBody>
+      </p:sp>
+      <p:cxnSp>
+        <p:nvCxnSpPr>
+          <p:cNvPr id="8" name="直線コネクタ 7">
+            <a:extLst>
+              <a:ext uri="{FF2B5EF4-FFF2-40B4-BE49-F238E27FC236}">
+                <a16:creationId xmlns:a16="http://schemas.microsoft.com/office/drawing/2014/main" id="{81078D3F-B133-A96E-BD22-B7220345F809}"/>
+              </a:ext>
+            </a:extLst>
+          </p:cNvPr>
+          <p:cNvCxnSpPr/>
+          <p:nvPr/>
+        </p:nvCxnSpPr>
+        <p:spPr>
+          <a:xfrm flipV="1">
+            <a:off x="8769866" y="1130300"/>
+            <a:ext cx="914400" cy="495300"/>
+          </a:xfrm>
+          <a:prstGeom prst="line">
+            <a:avLst/>
+          </a:prstGeom>
+        </p:spPr>
+        <p:style>
+          <a:lnRef idx="2">
+            <a:schemeClr val="dk1"/>
+          </a:lnRef>
+          <a:fillRef idx="0">
+            <a:schemeClr val="dk1"/>
+          </a:fillRef>
+          <a:effectRef idx="1">
+            <a:schemeClr val="dk1"/>
+          </a:effectRef>
+          <a:fontRef idx="minor">
+            <a:schemeClr val="tx1"/>
+          </a:fontRef>
+        </p:style>
+      </p:cxnSp>
+      <mc:AlternateContent xmlns:mc="http://schemas.openxmlformats.org/markup-compatibility/2006">
+        <mc:Choice xmlns:a14="http://schemas.microsoft.com/office/drawing/2010/main" Requires="a14">
+          <p:sp>
+            <p:nvSpPr>
+              <p:cNvPr id="10" name="テキスト ボックス 9">
+                <a:extLst>
+                  <a:ext uri="{FF2B5EF4-FFF2-40B4-BE49-F238E27FC236}">
+                    <a16:creationId xmlns:a16="http://schemas.microsoft.com/office/drawing/2014/main" id="{41FAE07D-4F85-412F-79A5-57B4A6B6D1C0}"/>
+                  </a:ext>
+                </a:extLst>
+              </p:cNvPr>
+              <p:cNvSpPr txBox="1"/>
+              <p:nvPr/>
+            </p:nvSpPr>
+            <p:spPr>
+              <a:xfrm>
+                <a:off x="9487470" y="853301"/>
+                <a:ext cx="1056187" cy="276999"/>
+              </a:xfrm>
+              <a:prstGeom prst="rect">
+                <a:avLst/>
+              </a:prstGeom>
+              <a:noFill/>
+            </p:spPr>
+            <p:txBody>
+              <a:bodyPr wrap="none" lIns="0" tIns="0" rIns="0" bIns="0" rtlCol="0">
+                <a:spAutoFit/>
+              </a:bodyPr>
+              <a:lstStyle/>
+              <a:p>
+                <a14:m>
+                  <m:oMathPara xmlns:m="http://schemas.openxmlformats.org/officeDocument/2006/math">
+                    <m:oMathParaPr>
+                      <m:jc m:val="centerGroup"/>
+                    </m:oMathParaPr>
+                    <m:oMath xmlns:m="http://schemas.openxmlformats.org/officeDocument/2006/math">
+                      <m:r>
+                        <a:rPr kumimoji="1" lang="ja-JP" altLang="en-US" i="1" smtClean="0">
+                          <a:latin typeface="Cambria Math" panose="02040503050406030204" pitchFamily="18" charset="0"/>
+                        </a:rPr>
+                        <m:t>𝛾</m:t>
+                      </m:r>
+                      <m:r>
+                        <a:rPr kumimoji="1" lang="en-US" altLang="ja-JP" b="0" i="1" smtClean="0">
+                          <a:latin typeface="Cambria Math" panose="02040503050406030204" pitchFamily="18" charset="0"/>
+                        </a:rPr>
+                        <m:t>=0.001</m:t>
+                      </m:r>
+                    </m:oMath>
+                  </m:oMathPara>
+                </a14:m>
+                <a:endParaRPr kumimoji="1" lang="ja-JP" altLang="en-US"/>
+              </a:p>
+            </p:txBody>
+          </p:sp>
+        </mc:Choice>
+        <mc:Fallback>
+          <p:sp>
+            <p:nvSpPr>
+              <p:cNvPr id="10" name="テキスト ボックス 9">
+                <a:extLst>
+                  <a:ext uri="{FF2B5EF4-FFF2-40B4-BE49-F238E27FC236}">
+                    <a16:creationId xmlns:a16="http://schemas.microsoft.com/office/drawing/2014/main" id="{41FAE07D-4F85-412F-79A5-57B4A6B6D1C0}"/>
+                  </a:ext>
+                </a:extLst>
+              </p:cNvPr>
+              <p:cNvSpPr txBox="1">
+                <a:spLocks noRot="1" noChangeAspect="1" noMove="1" noResize="1" noEditPoints="1" noAdjustHandles="1" noChangeArrowheads="1" noChangeShapeType="1" noTextEdit="1"/>
+              </p:cNvSpPr>
+              <p:nvPr/>
+            </p:nvSpPr>
+            <p:spPr>
+              <a:xfrm>
+                <a:off x="9487470" y="853301"/>
+                <a:ext cx="1056187" cy="276999"/>
+              </a:xfrm>
+              <a:prstGeom prst="rect">
+                <a:avLst/>
+              </a:prstGeom>
+              <a:blipFill>
+                <a:blip r:embed="rId3"/>
+                <a:stretch>
+                  <a:fillRect l="-3529" r="-3529" b="-31818"/>
+                </a:stretch>
+              </a:blipFill>
+            </p:spPr>
+            <p:txBody>
+              <a:bodyPr/>
+              <a:lstStyle/>
+              <a:p>
+                <a:r>
+                  <a:rPr lang="ja-JP" altLang="en-US">
+                    <a:noFill/>
+                  </a:rPr>
+                  <a:t> </a:t>
+                </a:r>
+              </a:p>
+            </p:txBody>
+          </p:sp>
+        </mc:Fallback>
+      </mc:AlternateContent>
+      <p:cxnSp>
+        <p:nvCxnSpPr>
+          <p:cNvPr id="11" name="直線コネクタ 10">
+            <a:extLst>
+              <a:ext uri="{FF2B5EF4-FFF2-40B4-BE49-F238E27FC236}">
+                <a16:creationId xmlns:a16="http://schemas.microsoft.com/office/drawing/2014/main" id="{981594B3-BA00-3F6F-79FA-B0C22B925763}"/>
+              </a:ext>
+            </a:extLst>
+          </p:cNvPr>
+          <p:cNvCxnSpPr>
+            <a:cxnSpLocks/>
+          </p:cNvCxnSpPr>
+          <p:nvPr/>
+        </p:nvCxnSpPr>
+        <p:spPr>
+          <a:xfrm>
+            <a:off x="8991208" y="2971800"/>
+            <a:ext cx="235858" cy="774700"/>
+          </a:xfrm>
+          <a:prstGeom prst="line">
+            <a:avLst/>
+          </a:prstGeom>
+        </p:spPr>
+        <p:style>
+          <a:lnRef idx="2">
+            <a:schemeClr val="dk1"/>
+          </a:lnRef>
+          <a:fillRef idx="0">
+            <a:schemeClr val="dk1"/>
+          </a:fillRef>
+          <a:effectRef idx="1">
+            <a:schemeClr val="dk1"/>
+          </a:effectRef>
+          <a:fontRef idx="minor">
+            <a:schemeClr val="tx1"/>
+          </a:fontRef>
+        </p:style>
+      </p:cxnSp>
+      <mc:AlternateContent xmlns:mc="http://schemas.openxmlformats.org/markup-compatibility/2006">
+        <mc:Choice xmlns:a14="http://schemas.microsoft.com/office/drawing/2010/main" Requires="a14">
+          <p:sp>
+            <p:nvSpPr>
+              <p:cNvPr id="15" name="テキスト ボックス 14">
+                <a:extLst>
+                  <a:ext uri="{FF2B5EF4-FFF2-40B4-BE49-F238E27FC236}">
+                    <a16:creationId xmlns:a16="http://schemas.microsoft.com/office/drawing/2014/main" id="{043D358F-C3BC-E3F6-7D51-B7AC42F26E0A}"/>
+                  </a:ext>
+                </a:extLst>
+              </p:cNvPr>
+              <p:cNvSpPr txBox="1"/>
+              <p:nvPr/>
+            </p:nvSpPr>
+            <p:spPr>
+              <a:xfrm>
+                <a:off x="9260429" y="3651708"/>
+                <a:ext cx="751616" cy="276999"/>
+              </a:xfrm>
+              <a:prstGeom prst="rect">
+                <a:avLst/>
+              </a:prstGeom>
+              <a:noFill/>
+            </p:spPr>
+            <p:txBody>
+              <a:bodyPr wrap="none" lIns="0" tIns="0" rIns="0" bIns="0" rtlCol="0">
+                <a:spAutoFit/>
+              </a:bodyPr>
+              <a:lstStyle/>
+              <a:p>
+                <a14:m>
+                  <m:oMathPara xmlns:m="http://schemas.openxmlformats.org/officeDocument/2006/math">
+                    <m:oMathParaPr>
+                      <m:jc m:val="centerGroup"/>
+                    </m:oMathParaPr>
+                    <m:oMath xmlns:m="http://schemas.openxmlformats.org/officeDocument/2006/math">
+                      <m:r>
+                        <a:rPr kumimoji="1" lang="ja-JP" altLang="en-US" i="1" smtClean="0">
+                          <a:latin typeface="Cambria Math" panose="02040503050406030204" pitchFamily="18" charset="0"/>
+                        </a:rPr>
+                        <m:t>𝛾</m:t>
+                      </m:r>
+                      <m:r>
+                        <a:rPr kumimoji="1" lang="en-US" altLang="ja-JP" b="0" i="1" smtClean="0">
+                          <a:latin typeface="Cambria Math" panose="02040503050406030204" pitchFamily="18" charset="0"/>
+                        </a:rPr>
+                        <m:t>=10</m:t>
+                      </m:r>
+                    </m:oMath>
+                  </m:oMathPara>
+                </a14:m>
+                <a:endParaRPr kumimoji="1" lang="ja-JP" altLang="en-US"/>
+              </a:p>
+            </p:txBody>
+          </p:sp>
+        </mc:Choice>
+        <mc:Fallback>
+          <p:sp>
+            <p:nvSpPr>
+              <p:cNvPr id="15" name="テキスト ボックス 14">
+                <a:extLst>
+                  <a:ext uri="{FF2B5EF4-FFF2-40B4-BE49-F238E27FC236}">
+                    <a16:creationId xmlns:a16="http://schemas.microsoft.com/office/drawing/2014/main" id="{043D358F-C3BC-E3F6-7D51-B7AC42F26E0A}"/>
+                  </a:ext>
+                </a:extLst>
+              </p:cNvPr>
+              <p:cNvSpPr txBox="1">
+                <a:spLocks noRot="1" noChangeAspect="1" noMove="1" noResize="1" noEditPoints="1" noAdjustHandles="1" noChangeArrowheads="1" noChangeShapeType="1" noTextEdit="1"/>
+              </p:cNvSpPr>
+              <p:nvPr/>
+            </p:nvSpPr>
+            <p:spPr>
+              <a:xfrm>
+                <a:off x="9260429" y="3651708"/>
+                <a:ext cx="751616" cy="276999"/>
+              </a:xfrm>
+              <a:prstGeom prst="rect">
+                <a:avLst/>
+              </a:prstGeom>
+              <a:blipFill>
+                <a:blip r:embed="rId4"/>
+                <a:stretch>
+                  <a:fillRect l="-6667" r="-5000" b="-26087"/>
+                </a:stretch>
+              </a:blipFill>
+            </p:spPr>
+            <p:txBody>
+              <a:bodyPr/>
+              <a:lstStyle/>
+              <a:p>
+                <a:r>
+                  <a:rPr lang="ja-JP" altLang="en-US">
+                    <a:noFill/>
+                  </a:rPr>
+                  <a:t> </a:t>
+                </a:r>
+              </a:p>
+            </p:txBody>
+          </p:sp>
+        </mc:Fallback>
+      </mc:AlternateContent>
+      <p:cxnSp>
+        <p:nvCxnSpPr>
+          <p:cNvPr id="16" name="直線コネクタ 15">
+            <a:extLst>
+              <a:ext uri="{FF2B5EF4-FFF2-40B4-BE49-F238E27FC236}">
+                <a16:creationId xmlns:a16="http://schemas.microsoft.com/office/drawing/2014/main" id="{F3D5449F-D4C8-DBDF-2CB0-DB88E01C8FA1}"/>
+              </a:ext>
+            </a:extLst>
+          </p:cNvPr>
+          <p:cNvCxnSpPr>
+            <a:cxnSpLocks/>
+          </p:cNvCxnSpPr>
+          <p:nvPr/>
+        </p:nvCxnSpPr>
+        <p:spPr>
+          <a:xfrm flipH="1">
+            <a:off x="8045966" y="3651708"/>
+            <a:ext cx="221734" cy="774700"/>
+          </a:xfrm>
+          <a:prstGeom prst="line">
+            <a:avLst/>
+          </a:prstGeom>
+        </p:spPr>
+        <p:style>
+          <a:lnRef idx="2">
+            <a:schemeClr val="dk1"/>
+          </a:lnRef>
+          <a:fillRef idx="0">
+            <a:schemeClr val="dk1"/>
+          </a:fillRef>
+          <a:effectRef idx="1">
+            <a:schemeClr val="dk1"/>
+          </a:effectRef>
+          <a:fontRef idx="minor">
+            <a:schemeClr val="tx1"/>
+          </a:fontRef>
+        </p:style>
+      </p:cxnSp>
+      <mc:AlternateContent xmlns:mc="http://schemas.openxmlformats.org/markup-compatibility/2006">
+        <mc:Choice xmlns:a14="http://schemas.microsoft.com/office/drawing/2010/main" Requires="a14">
+          <p:sp>
+            <p:nvSpPr>
+              <p:cNvPr id="18" name="テキスト ボックス 17">
+                <a:extLst>
+                  <a:ext uri="{FF2B5EF4-FFF2-40B4-BE49-F238E27FC236}">
+                    <a16:creationId xmlns:a16="http://schemas.microsoft.com/office/drawing/2014/main" id="{AD77C420-791B-9E75-5EA1-4B356FC08DE0}"/>
+                  </a:ext>
+                </a:extLst>
+              </p:cNvPr>
+              <p:cNvSpPr txBox="1"/>
+              <p:nvPr/>
+            </p:nvSpPr>
+            <p:spPr>
+              <a:xfrm>
+                <a:off x="7670158" y="4380242"/>
+                <a:ext cx="799706" cy="276999"/>
+              </a:xfrm>
+              <a:prstGeom prst="rect">
+                <a:avLst/>
+              </a:prstGeom>
+              <a:noFill/>
+            </p:spPr>
+            <p:txBody>
+              <a:bodyPr wrap="none" lIns="0" tIns="0" rIns="0" bIns="0" rtlCol="0">
+                <a:spAutoFit/>
+              </a:bodyPr>
+              <a:lstStyle/>
+              <a:p>
+                <a14:m>
+                  <m:oMathPara xmlns:m="http://schemas.openxmlformats.org/officeDocument/2006/math">
+                    <m:oMathParaPr>
+                      <m:jc m:val="centerGroup"/>
+                    </m:oMathParaPr>
+                    <m:oMath xmlns:m="http://schemas.openxmlformats.org/officeDocument/2006/math">
+                      <m:r>
+                        <a:rPr kumimoji="1" lang="ja-JP" altLang="en-US" i="1" smtClean="0">
+                          <a:latin typeface="Cambria Math" panose="02040503050406030204" pitchFamily="18" charset="0"/>
+                        </a:rPr>
+                        <m:t>𝛾</m:t>
+                      </m:r>
+                      <m:r>
+                        <a:rPr kumimoji="1" lang="en-US" altLang="ja-JP" b="0" i="1" smtClean="0">
+                          <a:latin typeface="Cambria Math" panose="02040503050406030204" pitchFamily="18" charset="0"/>
+                        </a:rPr>
+                        <m:t>=0.1</m:t>
+                      </m:r>
+                    </m:oMath>
+                  </m:oMathPara>
+                </a14:m>
+                <a:endParaRPr kumimoji="1" lang="ja-JP" altLang="en-US"/>
+              </a:p>
+            </p:txBody>
+          </p:sp>
+        </mc:Choice>
+        <mc:Fallback>
+          <p:sp>
+            <p:nvSpPr>
+              <p:cNvPr id="18" name="テキスト ボックス 17">
+                <a:extLst>
+                  <a:ext uri="{FF2B5EF4-FFF2-40B4-BE49-F238E27FC236}">
+                    <a16:creationId xmlns:a16="http://schemas.microsoft.com/office/drawing/2014/main" id="{AD77C420-791B-9E75-5EA1-4B356FC08DE0}"/>
+                  </a:ext>
+                </a:extLst>
+              </p:cNvPr>
+              <p:cNvSpPr txBox="1">
+                <a:spLocks noRot="1" noChangeAspect="1" noMove="1" noResize="1" noEditPoints="1" noAdjustHandles="1" noChangeArrowheads="1" noChangeShapeType="1" noTextEdit="1"/>
+              </p:cNvSpPr>
+              <p:nvPr/>
+            </p:nvSpPr>
+            <p:spPr>
+              <a:xfrm>
+                <a:off x="7670158" y="4380242"/>
+                <a:ext cx="799706" cy="276999"/>
+              </a:xfrm>
+              <a:prstGeom prst="rect">
+                <a:avLst/>
+              </a:prstGeom>
+              <a:blipFill>
+                <a:blip r:embed="rId5"/>
+                <a:stretch>
+                  <a:fillRect l="-4688" r="-6250" b="-27273"/>
+                </a:stretch>
+              </a:blipFill>
+            </p:spPr>
+            <p:txBody>
+              <a:bodyPr/>
+              <a:lstStyle/>
+              <a:p>
+                <a:r>
+                  <a:rPr lang="ja-JP" altLang="en-US">
+                    <a:noFill/>
+                  </a:rPr>
+                  <a:t> </a:t>
+                </a:r>
+              </a:p>
+            </p:txBody>
+          </p:sp>
+        </mc:Fallback>
+      </mc:AlternateContent>
+      <p:cxnSp>
+        <p:nvCxnSpPr>
+          <p:cNvPr id="19" name="直線コネクタ 18">
+            <a:extLst>
+              <a:ext uri="{FF2B5EF4-FFF2-40B4-BE49-F238E27FC236}">
+                <a16:creationId xmlns:a16="http://schemas.microsoft.com/office/drawing/2014/main" id="{B57D10E0-6EAE-64C5-DF5B-C909B943CCBD}"/>
+              </a:ext>
+            </a:extLst>
+          </p:cNvPr>
+          <p:cNvCxnSpPr>
+            <a:cxnSpLocks/>
+          </p:cNvCxnSpPr>
+          <p:nvPr/>
+        </p:nvCxnSpPr>
+        <p:spPr>
+          <a:xfrm flipV="1">
+            <a:off x="8953678" y="2051050"/>
+            <a:ext cx="533792" cy="247650"/>
+          </a:xfrm>
+          <a:prstGeom prst="line">
+            <a:avLst/>
+          </a:prstGeom>
+        </p:spPr>
+        <p:style>
+          <a:lnRef idx="2">
+            <a:schemeClr val="dk1"/>
+          </a:lnRef>
+          <a:fillRef idx="0">
+            <a:schemeClr val="dk1"/>
+          </a:fillRef>
+          <a:effectRef idx="1">
+            <a:schemeClr val="dk1"/>
+          </a:effectRef>
+          <a:fontRef idx="minor">
+            <a:schemeClr val="tx1"/>
+          </a:fontRef>
+        </p:style>
+      </p:cxnSp>
+      <mc:AlternateContent xmlns:mc="http://schemas.openxmlformats.org/markup-compatibility/2006">
+        <mc:Choice xmlns:a14="http://schemas.microsoft.com/office/drawing/2010/main" Requires="a14">
+          <p:sp>
+            <p:nvSpPr>
+              <p:cNvPr id="21" name="テキスト ボックス 20">
+                <a:extLst>
+                  <a:ext uri="{FF2B5EF4-FFF2-40B4-BE49-F238E27FC236}">
+                    <a16:creationId xmlns:a16="http://schemas.microsoft.com/office/drawing/2014/main" id="{F9320362-E078-7C4F-DA79-A9B7A5765FE4}"/>
+                  </a:ext>
+                </a:extLst>
+              </p:cNvPr>
+              <p:cNvSpPr txBox="1"/>
+              <p:nvPr/>
+            </p:nvSpPr>
+            <p:spPr>
+              <a:xfrm>
+                <a:off x="9417050" y="1727855"/>
+                <a:ext cx="927946" cy="276999"/>
+              </a:xfrm>
+              <a:prstGeom prst="rect">
+                <a:avLst/>
+              </a:prstGeom>
+              <a:noFill/>
+            </p:spPr>
+            <p:txBody>
+              <a:bodyPr wrap="none" lIns="0" tIns="0" rIns="0" bIns="0" rtlCol="0">
+                <a:spAutoFit/>
+              </a:bodyPr>
+              <a:lstStyle/>
+              <a:p>
+                <a14:m>
+                  <m:oMathPara xmlns:m="http://schemas.openxmlformats.org/officeDocument/2006/math">
+                    <m:oMathParaPr>
+                      <m:jc m:val="centerGroup"/>
+                    </m:oMathParaPr>
+                    <m:oMath xmlns:m="http://schemas.openxmlformats.org/officeDocument/2006/math">
+                      <m:r>
+                        <a:rPr kumimoji="1" lang="ja-JP" altLang="en-US" i="1" smtClean="0">
+                          <a:latin typeface="Cambria Math" panose="02040503050406030204" pitchFamily="18" charset="0"/>
+                        </a:rPr>
+                        <m:t>𝛾</m:t>
+                      </m:r>
+                      <m:r>
+                        <a:rPr kumimoji="1" lang="en-US" altLang="ja-JP" b="0" i="1" smtClean="0">
+                          <a:latin typeface="Cambria Math" panose="02040503050406030204" pitchFamily="18" charset="0"/>
+                        </a:rPr>
+                        <m:t>=0.01</m:t>
+                      </m:r>
+                    </m:oMath>
+                  </m:oMathPara>
+                </a14:m>
+                <a:endParaRPr kumimoji="1" lang="ja-JP" altLang="en-US"/>
+              </a:p>
+            </p:txBody>
+          </p:sp>
+        </mc:Choice>
+        <mc:Fallback>
+          <p:sp>
+            <p:nvSpPr>
+              <p:cNvPr id="21" name="テキスト ボックス 20">
+                <a:extLst>
+                  <a:ext uri="{FF2B5EF4-FFF2-40B4-BE49-F238E27FC236}">
+                    <a16:creationId xmlns:a16="http://schemas.microsoft.com/office/drawing/2014/main" id="{F9320362-E078-7C4F-DA79-A9B7A5765FE4}"/>
+                  </a:ext>
+                </a:extLst>
+              </p:cNvPr>
+              <p:cNvSpPr txBox="1">
+                <a:spLocks noRot="1" noChangeAspect="1" noMove="1" noResize="1" noEditPoints="1" noAdjustHandles="1" noChangeArrowheads="1" noChangeShapeType="1" noTextEdit="1"/>
+              </p:cNvSpPr>
+              <p:nvPr/>
+            </p:nvSpPr>
+            <p:spPr>
+              <a:xfrm>
+                <a:off x="9417050" y="1727855"/>
+                <a:ext cx="927946" cy="276999"/>
+              </a:xfrm>
+              <a:prstGeom prst="rect">
+                <a:avLst/>
+              </a:prstGeom>
+              <a:blipFill>
+                <a:blip r:embed="rId6"/>
+                <a:stretch>
+                  <a:fillRect l="-5405" r="-4054" b="-26087"/>
+                </a:stretch>
+              </a:blipFill>
+            </p:spPr>
+            <p:txBody>
+              <a:bodyPr/>
+              <a:lstStyle/>
+              <a:p>
+                <a:r>
+                  <a:rPr lang="ja-JP" altLang="en-US">
+                    <a:noFill/>
+                  </a:rPr>
+                  <a:t> </a:t>
+                </a:r>
+              </a:p>
+            </p:txBody>
+          </p:sp>
+        </mc:Fallback>
+      </mc:AlternateContent>
+      <p:cxnSp>
+        <p:nvCxnSpPr>
+          <p:cNvPr id="22" name="直線コネクタ 21">
+            <a:extLst>
+              <a:ext uri="{FF2B5EF4-FFF2-40B4-BE49-F238E27FC236}">
+                <a16:creationId xmlns:a16="http://schemas.microsoft.com/office/drawing/2014/main" id="{D0D890B5-9CF9-8ABD-C8F7-E4ADC12EFFBD}"/>
+              </a:ext>
+            </a:extLst>
+          </p:cNvPr>
+          <p:cNvCxnSpPr>
+            <a:cxnSpLocks/>
+          </p:cNvCxnSpPr>
+          <p:nvPr/>
+        </p:nvCxnSpPr>
+        <p:spPr>
+          <a:xfrm flipV="1">
+            <a:off x="6972300" y="2451213"/>
+            <a:ext cx="1718325" cy="357264"/>
+          </a:xfrm>
+          <a:prstGeom prst="line">
+            <a:avLst/>
+          </a:prstGeom>
+        </p:spPr>
+        <p:style>
+          <a:lnRef idx="2">
+            <a:schemeClr val="dk1"/>
+          </a:lnRef>
+          <a:fillRef idx="0">
+            <a:schemeClr val="dk1"/>
+          </a:fillRef>
+          <a:effectRef idx="1">
+            <a:schemeClr val="dk1"/>
+          </a:effectRef>
+          <a:fontRef idx="minor">
+            <a:schemeClr val="tx1"/>
+          </a:fontRef>
+        </p:style>
+      </p:cxnSp>
+      <mc:AlternateContent xmlns:mc="http://schemas.openxmlformats.org/markup-compatibility/2006">
+        <mc:Choice xmlns:a14="http://schemas.microsoft.com/office/drawing/2010/main" Requires="a14">
+          <p:sp>
+            <p:nvSpPr>
+              <p:cNvPr id="24" name="テキスト ボックス 23">
+                <a:extLst>
+                  <a:ext uri="{FF2B5EF4-FFF2-40B4-BE49-F238E27FC236}">
+                    <a16:creationId xmlns:a16="http://schemas.microsoft.com/office/drawing/2014/main" id="{2DAAD978-387F-0BB1-C743-32D7A543D30C}"/>
+                  </a:ext>
+                </a:extLst>
+              </p:cNvPr>
+              <p:cNvSpPr txBox="1"/>
+              <p:nvPr/>
+            </p:nvSpPr>
+            <p:spPr>
+              <a:xfrm>
+                <a:off x="6377305" y="2833300"/>
+                <a:ext cx="623376" cy="276999"/>
+              </a:xfrm>
+              <a:prstGeom prst="rect">
+                <a:avLst/>
+              </a:prstGeom>
+              <a:noFill/>
+            </p:spPr>
+            <p:txBody>
+              <a:bodyPr wrap="none" lIns="0" tIns="0" rIns="0" bIns="0" rtlCol="0">
+                <a:spAutoFit/>
+              </a:bodyPr>
+              <a:lstStyle/>
+              <a:p>
+                <a14:m>
+                  <m:oMathPara xmlns:m="http://schemas.openxmlformats.org/officeDocument/2006/math">
+                    <m:oMathParaPr>
+                      <m:jc m:val="centerGroup"/>
+                    </m:oMathParaPr>
+                    <m:oMath xmlns:m="http://schemas.openxmlformats.org/officeDocument/2006/math">
+                      <m:r>
+                        <a:rPr kumimoji="1" lang="ja-JP" altLang="en-US" i="1" smtClean="0">
+                          <a:latin typeface="Cambria Math" panose="02040503050406030204" pitchFamily="18" charset="0"/>
+                        </a:rPr>
+                        <m:t>𝛾</m:t>
+                      </m:r>
+                      <m:r>
+                        <a:rPr kumimoji="1" lang="en-US" altLang="ja-JP" b="0" i="1" smtClean="0">
+                          <a:latin typeface="Cambria Math" panose="02040503050406030204" pitchFamily="18" charset="0"/>
+                        </a:rPr>
+                        <m:t>=1</m:t>
+                      </m:r>
+                    </m:oMath>
+                  </m:oMathPara>
+                </a14:m>
+                <a:endParaRPr kumimoji="1" lang="ja-JP" altLang="en-US"/>
+              </a:p>
+            </p:txBody>
+          </p:sp>
+        </mc:Choice>
+        <mc:Fallback>
+          <p:sp>
+            <p:nvSpPr>
+              <p:cNvPr id="24" name="テキスト ボックス 23">
+                <a:extLst>
+                  <a:ext uri="{FF2B5EF4-FFF2-40B4-BE49-F238E27FC236}">
+                    <a16:creationId xmlns:a16="http://schemas.microsoft.com/office/drawing/2014/main" id="{2DAAD978-387F-0BB1-C743-32D7A543D30C}"/>
+                  </a:ext>
+                </a:extLst>
+              </p:cNvPr>
+              <p:cNvSpPr txBox="1">
+                <a:spLocks noRot="1" noChangeAspect="1" noMove="1" noResize="1" noEditPoints="1" noAdjustHandles="1" noChangeArrowheads="1" noChangeShapeType="1" noTextEdit="1"/>
+              </p:cNvSpPr>
+              <p:nvPr/>
+            </p:nvSpPr>
+            <p:spPr>
+              <a:xfrm>
+                <a:off x="6377305" y="2833300"/>
+                <a:ext cx="623376" cy="276999"/>
+              </a:xfrm>
+              <a:prstGeom prst="rect">
+                <a:avLst/>
+              </a:prstGeom>
+              <a:blipFill>
+                <a:blip r:embed="rId7"/>
+                <a:stretch>
+                  <a:fillRect l="-8000" r="-6000" b="-31818"/>
+                </a:stretch>
+              </a:blipFill>
+            </p:spPr>
+            <p:txBody>
+              <a:bodyPr/>
+              <a:lstStyle/>
+              <a:p>
+                <a:r>
+                  <a:rPr lang="ja-JP" altLang="en-US">
+                    <a:noFill/>
+                  </a:rPr>
+                  <a:t> </a:t>
+                </a:r>
+              </a:p>
+            </p:txBody>
+          </p:sp>
+        </mc:Fallback>
+      </mc:AlternateContent>
+    </p:spTree>
+    <p:extLst>
+      <p:ext uri="{BB962C8B-B14F-4D97-AF65-F5344CB8AC3E}">
+        <p14:creationId xmlns:p14="http://schemas.microsoft.com/office/powerpoint/2010/main" val="332890375"/>
+      </p:ext>
+    </p:extLst>
+  </p:cSld>
+  <p:clrMapOvr>
+    <a:masterClrMapping/>
+  </p:clrMapOvr>
+</p:sld>
+</file>
+
+<file path=ppt/slides/slide12.xml><?xml version="1.0" encoding="utf-8"?>
+<p:sld xmlns:a="http://schemas.openxmlformats.org/drawingml/2006/main" xmlns:r="http://schemas.openxmlformats.org/officeDocument/2006/relationships" xmlns:p="http://schemas.openxmlformats.org/presentationml/2006/main">
+  <p:cSld>
+    <p:spTree>
+      <p:nvGrpSpPr>
+        <p:cNvPr id="1" name=""/>
+        <p:cNvGrpSpPr/>
+        <p:nvPr/>
+      </p:nvGrpSpPr>
+      <p:grpSpPr>
+        <a:xfrm>
+          <a:off x="0" y="0"/>
+          <a:ext cx="0" cy="0"/>
+          <a:chOff x="0" y="0"/>
+          <a:chExt cx="0" cy="0"/>
+        </a:xfrm>
+      </p:grpSpPr>
+      <p:pic>
+        <p:nvPicPr>
+          <p:cNvPr id="3" name="図 2">
+            <a:extLst>
+              <a:ext uri="{FF2B5EF4-FFF2-40B4-BE49-F238E27FC236}">
+                <a16:creationId xmlns:a16="http://schemas.microsoft.com/office/drawing/2014/main" id="{B244AD5A-3184-D244-BA28-D79FDF0D32DC}"/>
+              </a:ext>
+            </a:extLst>
+          </p:cNvPr>
+          <p:cNvPicPr>
+            <a:picLocks noChangeAspect="1"/>
+          </p:cNvPicPr>
+          <p:nvPr/>
+        </p:nvPicPr>
+        <p:blipFill>
+          <a:blip r:embed="rId2"/>
+          <a:stretch>
+            <a:fillRect/>
+          </a:stretch>
+        </p:blipFill>
+        <p:spPr>
+          <a:xfrm>
+            <a:off x="2540000" y="1295400"/>
+            <a:ext cx="7112000" cy="4267200"/>
+          </a:xfrm>
+          <a:prstGeom prst="rect">
+            <a:avLst/>
+          </a:prstGeom>
+        </p:spPr>
+      </p:pic>
+      <p:sp>
+        <p:nvSpPr>
+          <p:cNvPr id="4" name="テキスト ボックス 3">
+            <a:extLst>
+              <a:ext uri="{FF2B5EF4-FFF2-40B4-BE49-F238E27FC236}">
+                <a16:creationId xmlns:a16="http://schemas.microsoft.com/office/drawing/2014/main" id="{354733F0-70EE-8D22-1495-D5B7518219DA}"/>
+              </a:ext>
+            </a:extLst>
+          </p:cNvPr>
+          <p:cNvSpPr txBox="1"/>
+          <p:nvPr/>
+        </p:nvSpPr>
+        <p:spPr>
+          <a:xfrm>
+            <a:off x="3753050" y="5793891"/>
+            <a:ext cx="4926349" cy="369332"/>
+          </a:xfrm>
+          <a:prstGeom prst="rect">
+            <a:avLst/>
+          </a:prstGeom>
+          <a:noFill/>
+        </p:spPr>
+        <p:txBody>
+          <a:bodyPr wrap="none" rtlCol="0">
+            <a:spAutoFit/>
+          </a:bodyPr>
+          <a:lstStyle/>
+          <a:p>
+            <a:r>
+              <a:rPr kumimoji="1" lang="ja-JP" altLang="en-US"/>
+              <a:t>図</a:t>
+            </a:r>
+            <a:r>
+              <a:rPr kumimoji="1" lang="en-US" altLang="ja-JP" dirty="0"/>
+              <a:t>4-2-1</a:t>
+            </a:r>
+            <a:r>
+              <a:rPr kumimoji="1" lang="ja-JP" altLang="en-US"/>
+              <a:t>　</a:t>
+            </a:r>
+            <a:r>
+              <a:rPr lang="ja-JP" altLang="en-US"/>
+              <a:t>多項式</a:t>
+            </a:r>
+            <a:r>
+              <a:rPr kumimoji="1" lang="ja-JP" altLang="en-US"/>
+              <a:t>カーネルの実行結果のグラフ</a:t>
+            </a:r>
+          </a:p>
+        </p:txBody>
+      </p:sp>
+      <p:sp>
+        <p:nvSpPr>
+          <p:cNvPr id="5" name="テキスト ボックス 4">
+            <a:extLst>
+              <a:ext uri="{FF2B5EF4-FFF2-40B4-BE49-F238E27FC236}">
+                <a16:creationId xmlns:a16="http://schemas.microsoft.com/office/drawing/2014/main" id="{16A94B6A-F380-72F3-8C2D-A0CC5B932C93}"/>
+              </a:ext>
+            </a:extLst>
+          </p:cNvPr>
+          <p:cNvSpPr txBox="1"/>
+          <p:nvPr/>
+        </p:nvSpPr>
+        <p:spPr>
+          <a:xfrm>
+            <a:off x="6045345" y="5424559"/>
+            <a:ext cx="341760" cy="369332"/>
+          </a:xfrm>
+          <a:prstGeom prst="rect">
+            <a:avLst/>
+          </a:prstGeom>
+          <a:noFill/>
+        </p:spPr>
+        <p:txBody>
+          <a:bodyPr wrap="none" rtlCol="0">
+            <a:spAutoFit/>
+          </a:bodyPr>
+          <a:lstStyle/>
+          <a:p>
+            <a:r>
+              <a:rPr kumimoji="1" lang="en-US" altLang="ja-JP" dirty="0"/>
+              <a:t>C</a:t>
+            </a:r>
+            <a:endParaRPr kumimoji="1" lang="ja-JP" altLang="en-US"/>
+          </a:p>
+        </p:txBody>
+      </p:sp>
+      <p:sp>
+        <p:nvSpPr>
+          <p:cNvPr id="7" name="テキスト ボックス 6">
+            <a:extLst>
+              <a:ext uri="{FF2B5EF4-FFF2-40B4-BE49-F238E27FC236}">
+                <a16:creationId xmlns:a16="http://schemas.microsoft.com/office/drawing/2014/main" id="{5BA1240F-FE1D-F005-9C61-A9C64E98BF74}"/>
+              </a:ext>
+            </a:extLst>
+          </p:cNvPr>
+          <p:cNvSpPr txBox="1"/>
+          <p:nvPr/>
+        </p:nvSpPr>
+        <p:spPr>
+          <a:xfrm rot="16200000">
+            <a:off x="1919478" y="3244333"/>
+            <a:ext cx="1241045" cy="369332"/>
+          </a:xfrm>
+          <a:prstGeom prst="rect">
+            <a:avLst/>
+          </a:prstGeom>
+          <a:noFill/>
+        </p:spPr>
+        <p:txBody>
+          <a:bodyPr wrap="none" rtlCol="0">
+            <a:spAutoFit/>
+          </a:bodyPr>
+          <a:lstStyle/>
+          <a:p>
+            <a:r>
+              <a:rPr kumimoji="1" lang="ja-JP" altLang="en-US"/>
+              <a:t>正解率</a:t>
+            </a:r>
+            <a:r>
+              <a:rPr lang="en-US" altLang="ja-JP" dirty="0"/>
+              <a:t>(%)</a:t>
+            </a:r>
+            <a:endParaRPr kumimoji="1" lang="ja-JP" altLang="en-US"/>
+          </a:p>
+        </p:txBody>
+      </p:sp>
+      <mc:AlternateContent xmlns:mc="http://schemas.openxmlformats.org/markup-compatibility/2006">
+        <mc:Choice xmlns:a14="http://schemas.microsoft.com/office/drawing/2010/main" Requires="a14">
+          <p:sp>
+            <p:nvSpPr>
+              <p:cNvPr id="8" name="テキスト ボックス 7">
+                <a:extLst>
+                  <a:ext uri="{FF2B5EF4-FFF2-40B4-BE49-F238E27FC236}">
+                    <a16:creationId xmlns:a16="http://schemas.microsoft.com/office/drawing/2014/main" id="{F9E9D149-9CF3-D248-8E49-BD392C1DDA41}"/>
+                  </a:ext>
+                </a:extLst>
+              </p:cNvPr>
+              <p:cNvSpPr txBox="1"/>
+              <p:nvPr/>
+            </p:nvSpPr>
+            <p:spPr>
+              <a:xfrm>
+                <a:off x="9402334" y="2186602"/>
+                <a:ext cx="1093248" cy="276999"/>
+              </a:xfrm>
+              <a:prstGeom prst="rect">
+                <a:avLst/>
+              </a:prstGeom>
+              <a:noFill/>
+            </p:spPr>
+            <p:txBody>
+              <a:bodyPr wrap="none" lIns="0" tIns="0" rIns="0" bIns="0" rtlCol="0">
+                <a:spAutoFit/>
+              </a:bodyPr>
+              <a:lstStyle/>
+              <a:p>
+                <a:r>
+                  <a:rPr kumimoji="1" lang="en-US" altLang="ja-JP" b="0" dirty="0"/>
+                  <a:t>degree</a:t>
+                </a:r>
+                <a14:m>
+                  <m:oMath xmlns:m="http://schemas.openxmlformats.org/officeDocument/2006/math">
+                    <m:r>
+                      <a:rPr kumimoji="1" lang="en-US" altLang="ja-JP" b="0" i="1" smtClean="0">
+                        <a:latin typeface="Cambria Math" panose="02040503050406030204" pitchFamily="18" charset="0"/>
+                      </a:rPr>
+                      <m:t>=5</m:t>
+                    </m:r>
+                  </m:oMath>
+                </a14:m>
+                <a:endParaRPr kumimoji="1" lang="ja-JP" altLang="en-US"/>
+              </a:p>
+            </p:txBody>
+          </p:sp>
+        </mc:Choice>
+        <mc:Fallback>
+          <p:sp>
+            <p:nvSpPr>
+              <p:cNvPr id="8" name="テキスト ボックス 7">
+                <a:extLst>
+                  <a:ext uri="{FF2B5EF4-FFF2-40B4-BE49-F238E27FC236}">
+                    <a16:creationId xmlns:a16="http://schemas.microsoft.com/office/drawing/2014/main" id="{F9E9D149-9CF3-D248-8E49-BD392C1DDA41}"/>
+                  </a:ext>
+                </a:extLst>
+              </p:cNvPr>
+              <p:cNvSpPr txBox="1">
+                <a:spLocks noRot="1" noChangeAspect="1" noMove="1" noResize="1" noEditPoints="1" noAdjustHandles="1" noChangeArrowheads="1" noChangeShapeType="1" noTextEdit="1"/>
+              </p:cNvSpPr>
+              <p:nvPr/>
+            </p:nvSpPr>
+            <p:spPr>
+              <a:xfrm>
+                <a:off x="9402334" y="2186602"/>
+                <a:ext cx="1093248" cy="276999"/>
+              </a:xfrm>
+              <a:prstGeom prst="rect">
+                <a:avLst/>
+              </a:prstGeom>
+              <a:blipFill>
+                <a:blip r:embed="rId3"/>
+                <a:stretch>
+                  <a:fillRect l="-12644" t="-27273" r="-6897" b="-54545"/>
+                </a:stretch>
+              </a:blipFill>
+            </p:spPr>
+            <p:txBody>
+              <a:bodyPr/>
+              <a:lstStyle/>
+              <a:p>
+                <a:r>
+                  <a:rPr lang="ja-JP" altLang="en-US">
+                    <a:noFill/>
+                  </a:rPr>
+                  <a:t> </a:t>
+                </a:r>
+              </a:p>
+            </p:txBody>
+          </p:sp>
+        </mc:Fallback>
+      </mc:AlternateContent>
+      <p:cxnSp>
+        <p:nvCxnSpPr>
+          <p:cNvPr id="10" name="直線コネクタ 9">
+            <a:extLst>
+              <a:ext uri="{FF2B5EF4-FFF2-40B4-BE49-F238E27FC236}">
+                <a16:creationId xmlns:a16="http://schemas.microsoft.com/office/drawing/2014/main" id="{5AAC3A6B-1701-0D2A-B63B-9ACB0A499D87}"/>
+              </a:ext>
+            </a:extLst>
+          </p:cNvPr>
+          <p:cNvCxnSpPr>
+            <a:cxnSpLocks/>
+          </p:cNvCxnSpPr>
+          <p:nvPr/>
+        </p:nvCxnSpPr>
+        <p:spPr>
+          <a:xfrm>
+            <a:off x="8625205" y="2026652"/>
+            <a:ext cx="762000" cy="298450"/>
+          </a:xfrm>
+          <a:prstGeom prst="line">
+            <a:avLst/>
+          </a:prstGeom>
+        </p:spPr>
+        <p:style>
+          <a:lnRef idx="2">
+            <a:schemeClr val="dk1"/>
+          </a:lnRef>
+          <a:fillRef idx="0">
+            <a:schemeClr val="dk1"/>
+          </a:fillRef>
+          <a:effectRef idx="1">
+            <a:schemeClr val="dk1"/>
+          </a:effectRef>
+          <a:fontRef idx="minor">
+            <a:schemeClr val="tx1"/>
+          </a:fontRef>
+        </p:style>
+      </p:cxnSp>
+      <p:cxnSp>
+        <p:nvCxnSpPr>
+          <p:cNvPr id="12" name="直線コネクタ 11">
+            <a:extLst>
+              <a:ext uri="{FF2B5EF4-FFF2-40B4-BE49-F238E27FC236}">
+                <a16:creationId xmlns:a16="http://schemas.microsoft.com/office/drawing/2014/main" id="{E8CBBAB4-DEC2-BC66-FF5E-C38F747277CE}"/>
+              </a:ext>
+            </a:extLst>
+          </p:cNvPr>
+          <p:cNvCxnSpPr>
+            <a:cxnSpLocks/>
+          </p:cNvCxnSpPr>
+          <p:nvPr/>
+        </p:nvCxnSpPr>
+        <p:spPr>
+          <a:xfrm>
+            <a:off x="8890000" y="2868055"/>
+            <a:ext cx="762000" cy="298450"/>
+          </a:xfrm>
+          <a:prstGeom prst="line">
+            <a:avLst/>
+          </a:prstGeom>
+        </p:spPr>
+        <p:style>
+          <a:lnRef idx="2">
+            <a:schemeClr val="dk1"/>
+          </a:lnRef>
+          <a:fillRef idx="0">
+            <a:schemeClr val="dk1"/>
+          </a:fillRef>
+          <a:effectRef idx="1">
+            <a:schemeClr val="dk1"/>
+          </a:effectRef>
+          <a:fontRef idx="minor">
+            <a:schemeClr val="tx1"/>
+          </a:fontRef>
+        </p:style>
+      </p:cxnSp>
+      <mc:AlternateContent xmlns:mc="http://schemas.openxmlformats.org/markup-compatibility/2006">
+        <mc:Choice xmlns:a14="http://schemas.microsoft.com/office/drawing/2010/main" Requires="a14">
+          <p:sp>
+            <p:nvSpPr>
+              <p:cNvPr id="13" name="テキスト ボックス 12">
+                <a:extLst>
+                  <a:ext uri="{FF2B5EF4-FFF2-40B4-BE49-F238E27FC236}">
+                    <a16:creationId xmlns:a16="http://schemas.microsoft.com/office/drawing/2014/main" id="{8811FF43-86F0-F3A4-5D07-3E36C24641CF}"/>
+                  </a:ext>
+                </a:extLst>
+              </p:cNvPr>
+              <p:cNvSpPr txBox="1"/>
+              <p:nvPr/>
+            </p:nvSpPr>
+            <p:spPr>
+              <a:xfrm>
+                <a:off x="9527167" y="3152000"/>
+                <a:ext cx="1093248" cy="276999"/>
+              </a:xfrm>
+              <a:prstGeom prst="rect">
+                <a:avLst/>
+              </a:prstGeom>
+              <a:noFill/>
+            </p:spPr>
+            <p:txBody>
+              <a:bodyPr wrap="none" lIns="0" tIns="0" rIns="0" bIns="0" rtlCol="0">
+                <a:spAutoFit/>
+              </a:bodyPr>
+              <a:lstStyle/>
+              <a:p>
+                <a:r>
+                  <a:rPr kumimoji="1" lang="en-US" altLang="ja-JP" b="0" dirty="0"/>
+                  <a:t>degree</a:t>
+                </a:r>
+                <a14:m>
+                  <m:oMath xmlns:m="http://schemas.openxmlformats.org/officeDocument/2006/math">
+                    <m:r>
+                      <a:rPr kumimoji="1" lang="en-US" altLang="ja-JP" b="0" i="1" smtClean="0">
+                        <a:latin typeface="Cambria Math" panose="02040503050406030204" pitchFamily="18" charset="0"/>
+                      </a:rPr>
+                      <m:t>=1</m:t>
+                    </m:r>
+                  </m:oMath>
+                </a14:m>
+                <a:endParaRPr kumimoji="1" lang="ja-JP" altLang="en-US"/>
+              </a:p>
+            </p:txBody>
+          </p:sp>
+        </mc:Choice>
+        <mc:Fallback>
+          <p:sp>
+            <p:nvSpPr>
+              <p:cNvPr id="13" name="テキスト ボックス 12">
+                <a:extLst>
+                  <a:ext uri="{FF2B5EF4-FFF2-40B4-BE49-F238E27FC236}">
+                    <a16:creationId xmlns:a16="http://schemas.microsoft.com/office/drawing/2014/main" id="{8811FF43-86F0-F3A4-5D07-3E36C24641CF}"/>
+                  </a:ext>
+                </a:extLst>
+              </p:cNvPr>
+              <p:cNvSpPr txBox="1">
+                <a:spLocks noRot="1" noChangeAspect="1" noMove="1" noResize="1" noEditPoints="1" noAdjustHandles="1" noChangeArrowheads="1" noChangeShapeType="1" noTextEdit="1"/>
+              </p:cNvSpPr>
+              <p:nvPr/>
+            </p:nvSpPr>
+            <p:spPr>
+              <a:xfrm>
+                <a:off x="9527167" y="3152000"/>
+                <a:ext cx="1093248" cy="276999"/>
+              </a:xfrm>
+              <a:prstGeom prst="rect">
+                <a:avLst/>
+              </a:prstGeom>
+              <a:blipFill>
+                <a:blip r:embed="rId4"/>
+                <a:stretch>
+                  <a:fillRect l="-13793" t="-27273" r="-5747" b="-54545"/>
+                </a:stretch>
+              </a:blipFill>
+            </p:spPr>
+            <p:txBody>
+              <a:bodyPr/>
+              <a:lstStyle/>
+              <a:p>
+                <a:r>
+                  <a:rPr lang="ja-JP" altLang="en-US">
+                    <a:noFill/>
+                  </a:rPr>
+                  <a:t> </a:t>
+                </a:r>
+              </a:p>
+            </p:txBody>
+          </p:sp>
+        </mc:Fallback>
+      </mc:AlternateContent>
+      <mc:AlternateContent xmlns:mc="http://schemas.openxmlformats.org/markup-compatibility/2006">
+        <mc:Choice xmlns:a14="http://schemas.microsoft.com/office/drawing/2010/main" Requires="a14">
+          <p:sp>
+            <p:nvSpPr>
+              <p:cNvPr id="14" name="テキスト ボックス 13">
+                <a:extLst>
+                  <a:ext uri="{FF2B5EF4-FFF2-40B4-BE49-F238E27FC236}">
+                    <a16:creationId xmlns:a16="http://schemas.microsoft.com/office/drawing/2014/main" id="{C1A8984D-B717-6ABA-495D-E30055217F10}"/>
+                  </a:ext>
+                </a:extLst>
+              </p:cNvPr>
+              <p:cNvSpPr txBox="1"/>
+              <p:nvPr/>
+            </p:nvSpPr>
+            <p:spPr>
+              <a:xfrm>
+                <a:off x="5840481" y="2669976"/>
+                <a:ext cx="1093248" cy="276999"/>
+              </a:xfrm>
+              <a:prstGeom prst="rect">
+                <a:avLst/>
+              </a:prstGeom>
+              <a:noFill/>
+            </p:spPr>
+            <p:txBody>
+              <a:bodyPr wrap="none" lIns="0" tIns="0" rIns="0" bIns="0" rtlCol="0">
+                <a:spAutoFit/>
+              </a:bodyPr>
+              <a:lstStyle/>
+              <a:p>
+                <a:r>
+                  <a:rPr kumimoji="1" lang="en-US" altLang="ja-JP" b="0" dirty="0"/>
+                  <a:t>degree</a:t>
+                </a:r>
+                <a14:m>
+                  <m:oMath xmlns:m="http://schemas.openxmlformats.org/officeDocument/2006/math">
+                    <m:r>
+                      <a:rPr kumimoji="1" lang="en-US" altLang="ja-JP" b="0" i="1" smtClean="0">
+                        <a:latin typeface="Cambria Math" panose="02040503050406030204" pitchFamily="18" charset="0"/>
+                      </a:rPr>
+                      <m:t>=2</m:t>
+                    </m:r>
+                  </m:oMath>
+                </a14:m>
+                <a:endParaRPr kumimoji="1" lang="ja-JP" altLang="en-US"/>
+              </a:p>
+            </p:txBody>
+          </p:sp>
+        </mc:Choice>
+        <mc:Fallback>
+          <p:sp>
+            <p:nvSpPr>
+              <p:cNvPr id="14" name="テキスト ボックス 13">
+                <a:extLst>
+                  <a:ext uri="{FF2B5EF4-FFF2-40B4-BE49-F238E27FC236}">
+                    <a16:creationId xmlns:a16="http://schemas.microsoft.com/office/drawing/2014/main" id="{C1A8984D-B717-6ABA-495D-E30055217F10}"/>
+                  </a:ext>
+                </a:extLst>
+              </p:cNvPr>
+              <p:cNvSpPr txBox="1">
+                <a:spLocks noRot="1" noChangeAspect="1" noMove="1" noResize="1" noEditPoints="1" noAdjustHandles="1" noChangeArrowheads="1" noChangeShapeType="1" noTextEdit="1"/>
+              </p:cNvSpPr>
+              <p:nvPr/>
+            </p:nvSpPr>
+            <p:spPr>
+              <a:xfrm>
+                <a:off x="5840481" y="2669976"/>
+                <a:ext cx="1093248" cy="276999"/>
+              </a:xfrm>
+              <a:prstGeom prst="rect">
+                <a:avLst/>
+              </a:prstGeom>
+              <a:blipFill>
+                <a:blip r:embed="rId5"/>
+                <a:stretch>
+                  <a:fillRect l="-12644" t="-27273" r="-6897" b="-54545"/>
+                </a:stretch>
+              </a:blipFill>
+            </p:spPr>
+            <p:txBody>
+              <a:bodyPr/>
+              <a:lstStyle/>
+              <a:p>
+                <a:r>
+                  <a:rPr lang="ja-JP" altLang="en-US">
+                    <a:noFill/>
+                  </a:rPr>
+                  <a:t> </a:t>
+                </a:r>
+              </a:p>
+            </p:txBody>
+          </p:sp>
+        </mc:Fallback>
+      </mc:AlternateContent>
+      <mc:AlternateContent xmlns:mc="http://schemas.openxmlformats.org/markup-compatibility/2006">
+        <mc:Choice xmlns:a14="http://schemas.microsoft.com/office/drawing/2010/main" Requires="a14">
+          <p:sp>
+            <p:nvSpPr>
+              <p:cNvPr id="15" name="テキスト ボックス 14">
+                <a:extLst>
+                  <a:ext uri="{FF2B5EF4-FFF2-40B4-BE49-F238E27FC236}">
+                    <a16:creationId xmlns:a16="http://schemas.microsoft.com/office/drawing/2014/main" id="{EA277393-0C8B-F88C-C87E-2D50D90D77DA}"/>
+                  </a:ext>
+                </a:extLst>
+              </p:cNvPr>
+              <p:cNvSpPr txBox="1"/>
+              <p:nvPr/>
+            </p:nvSpPr>
+            <p:spPr>
+              <a:xfrm>
+                <a:off x="7912957" y="4394399"/>
+                <a:ext cx="1093248" cy="276999"/>
+              </a:xfrm>
+              <a:prstGeom prst="rect">
+                <a:avLst/>
+              </a:prstGeom>
+              <a:noFill/>
+            </p:spPr>
+            <p:txBody>
+              <a:bodyPr wrap="none" lIns="0" tIns="0" rIns="0" bIns="0" rtlCol="0">
+                <a:spAutoFit/>
+              </a:bodyPr>
+              <a:lstStyle/>
+              <a:p>
+                <a:r>
+                  <a:rPr kumimoji="1" lang="en-US" altLang="ja-JP" b="0" dirty="0"/>
+                  <a:t>degree</a:t>
+                </a:r>
+                <a14:m>
+                  <m:oMath xmlns:m="http://schemas.openxmlformats.org/officeDocument/2006/math">
+                    <m:r>
+                      <a:rPr kumimoji="1" lang="en-US" altLang="ja-JP" b="0" i="1" smtClean="0">
+                        <a:latin typeface="Cambria Math" panose="02040503050406030204" pitchFamily="18" charset="0"/>
+                      </a:rPr>
+                      <m:t>=4</m:t>
+                    </m:r>
+                  </m:oMath>
+                </a14:m>
+                <a:endParaRPr kumimoji="1" lang="ja-JP" altLang="en-US"/>
+              </a:p>
+            </p:txBody>
+          </p:sp>
+        </mc:Choice>
+        <mc:Fallback>
+          <p:sp>
+            <p:nvSpPr>
+              <p:cNvPr id="15" name="テキスト ボックス 14">
+                <a:extLst>
+                  <a:ext uri="{FF2B5EF4-FFF2-40B4-BE49-F238E27FC236}">
+                    <a16:creationId xmlns:a16="http://schemas.microsoft.com/office/drawing/2014/main" id="{EA277393-0C8B-F88C-C87E-2D50D90D77DA}"/>
+                  </a:ext>
+                </a:extLst>
+              </p:cNvPr>
+              <p:cNvSpPr txBox="1">
+                <a:spLocks noRot="1" noChangeAspect="1" noMove="1" noResize="1" noEditPoints="1" noAdjustHandles="1" noChangeArrowheads="1" noChangeShapeType="1" noTextEdit="1"/>
+              </p:cNvSpPr>
+              <p:nvPr/>
+            </p:nvSpPr>
+            <p:spPr>
+              <a:xfrm>
+                <a:off x="7912957" y="4394399"/>
+                <a:ext cx="1093248" cy="276999"/>
+              </a:xfrm>
+              <a:prstGeom prst="rect">
+                <a:avLst/>
+              </a:prstGeom>
+              <a:blipFill>
+                <a:blip r:embed="rId6"/>
+                <a:stretch>
+                  <a:fillRect l="-12791" t="-27273" r="-6977" b="-54545"/>
+                </a:stretch>
+              </a:blipFill>
+            </p:spPr>
+            <p:txBody>
+              <a:bodyPr/>
+              <a:lstStyle/>
+              <a:p>
+                <a:r>
+                  <a:rPr lang="ja-JP" altLang="en-US">
+                    <a:noFill/>
+                  </a:rPr>
+                  <a:t> </a:t>
+                </a:r>
+              </a:p>
+            </p:txBody>
+          </p:sp>
+        </mc:Fallback>
+      </mc:AlternateContent>
+      <mc:AlternateContent xmlns:mc="http://schemas.openxmlformats.org/markup-compatibility/2006">
+        <mc:Choice xmlns:a14="http://schemas.microsoft.com/office/drawing/2010/main" Requires="a14">
+          <p:sp>
+            <p:nvSpPr>
+              <p:cNvPr id="16" name="テキスト ボックス 15">
+                <a:extLst>
+                  <a:ext uri="{FF2B5EF4-FFF2-40B4-BE49-F238E27FC236}">
+                    <a16:creationId xmlns:a16="http://schemas.microsoft.com/office/drawing/2014/main" id="{C7C229C1-43EA-DD48-7DDD-A7AA0E9CC95F}"/>
+                  </a:ext>
+                </a:extLst>
+              </p:cNvPr>
+              <p:cNvSpPr txBox="1"/>
+              <p:nvPr/>
+            </p:nvSpPr>
+            <p:spPr>
+              <a:xfrm>
+                <a:off x="9589584" y="3897756"/>
+                <a:ext cx="1093248" cy="276999"/>
+              </a:xfrm>
+              <a:prstGeom prst="rect">
+                <a:avLst/>
+              </a:prstGeom>
+              <a:noFill/>
+            </p:spPr>
+            <p:txBody>
+              <a:bodyPr wrap="none" lIns="0" tIns="0" rIns="0" bIns="0" rtlCol="0">
+                <a:spAutoFit/>
+              </a:bodyPr>
+              <a:lstStyle/>
+              <a:p>
+                <a:r>
+                  <a:rPr kumimoji="1" lang="en-US" altLang="ja-JP" b="0" dirty="0"/>
+                  <a:t>degree</a:t>
+                </a:r>
+                <a14:m>
+                  <m:oMath xmlns:m="http://schemas.openxmlformats.org/officeDocument/2006/math">
+                    <m:r>
+                      <a:rPr kumimoji="1" lang="en-US" altLang="ja-JP" b="0" i="1" smtClean="0">
+                        <a:latin typeface="Cambria Math" panose="02040503050406030204" pitchFamily="18" charset="0"/>
+                      </a:rPr>
+                      <m:t>=3</m:t>
+                    </m:r>
+                  </m:oMath>
+                </a14:m>
+                <a:endParaRPr kumimoji="1" lang="ja-JP" altLang="en-US"/>
+              </a:p>
+            </p:txBody>
+          </p:sp>
+        </mc:Choice>
+        <mc:Fallback>
+          <p:sp>
+            <p:nvSpPr>
+              <p:cNvPr id="16" name="テキスト ボックス 15">
+                <a:extLst>
+                  <a:ext uri="{FF2B5EF4-FFF2-40B4-BE49-F238E27FC236}">
+                    <a16:creationId xmlns:a16="http://schemas.microsoft.com/office/drawing/2014/main" id="{C7C229C1-43EA-DD48-7DDD-A7AA0E9CC95F}"/>
+                  </a:ext>
+                </a:extLst>
+              </p:cNvPr>
+              <p:cNvSpPr txBox="1">
+                <a:spLocks noRot="1" noChangeAspect="1" noMove="1" noResize="1" noEditPoints="1" noAdjustHandles="1" noChangeArrowheads="1" noChangeShapeType="1" noTextEdit="1"/>
+              </p:cNvSpPr>
+              <p:nvPr/>
+            </p:nvSpPr>
+            <p:spPr>
+              <a:xfrm>
+                <a:off x="9589584" y="3897756"/>
+                <a:ext cx="1093248" cy="276999"/>
+              </a:xfrm>
+              <a:prstGeom prst="rect">
+                <a:avLst/>
+              </a:prstGeom>
+              <a:blipFill>
+                <a:blip r:embed="rId7"/>
+                <a:stretch>
+                  <a:fillRect l="-12791" t="-26087" r="-6977" b="-52174"/>
+                </a:stretch>
+              </a:blipFill>
+            </p:spPr>
+            <p:txBody>
+              <a:bodyPr/>
+              <a:lstStyle/>
+              <a:p>
+                <a:r>
+                  <a:rPr lang="ja-JP" altLang="en-US">
+                    <a:noFill/>
+                  </a:rPr>
+                  <a:t> </a:t>
+                </a:r>
+              </a:p>
+            </p:txBody>
+          </p:sp>
+        </mc:Fallback>
+      </mc:AlternateContent>
+      <p:cxnSp>
+        <p:nvCxnSpPr>
+          <p:cNvPr id="17" name="直線コネクタ 16">
+            <a:extLst>
+              <a:ext uri="{FF2B5EF4-FFF2-40B4-BE49-F238E27FC236}">
+                <a16:creationId xmlns:a16="http://schemas.microsoft.com/office/drawing/2014/main" id="{EACA644F-B7BF-A6C3-EA30-A4C9522BDA8B}"/>
+              </a:ext>
+            </a:extLst>
+          </p:cNvPr>
+          <p:cNvCxnSpPr>
+            <a:cxnSpLocks/>
+          </p:cNvCxnSpPr>
+          <p:nvPr/>
+        </p:nvCxnSpPr>
+        <p:spPr>
+          <a:xfrm>
+            <a:off x="5131186" y="2289460"/>
+            <a:ext cx="762000" cy="298450"/>
+          </a:xfrm>
+          <a:prstGeom prst="line">
+            <a:avLst/>
+          </a:prstGeom>
+        </p:spPr>
+        <p:style>
+          <a:lnRef idx="2">
+            <a:schemeClr val="dk1"/>
+          </a:lnRef>
+          <a:fillRef idx="0">
+            <a:schemeClr val="dk1"/>
+          </a:fillRef>
+          <a:effectRef idx="1">
+            <a:schemeClr val="dk1"/>
+          </a:effectRef>
+          <a:fontRef idx="minor">
+            <a:schemeClr val="tx1"/>
+          </a:fontRef>
+        </p:style>
+      </p:cxnSp>
+      <p:cxnSp>
+        <p:nvCxnSpPr>
+          <p:cNvPr id="18" name="直線コネクタ 17">
+            <a:extLst>
+              <a:ext uri="{FF2B5EF4-FFF2-40B4-BE49-F238E27FC236}">
+                <a16:creationId xmlns:a16="http://schemas.microsoft.com/office/drawing/2014/main" id="{8AC003D6-2024-F962-B032-EBCAA380BA23}"/>
+              </a:ext>
+            </a:extLst>
+          </p:cNvPr>
+          <p:cNvCxnSpPr>
+            <a:cxnSpLocks/>
+          </p:cNvCxnSpPr>
+          <p:nvPr/>
+        </p:nvCxnSpPr>
+        <p:spPr>
+          <a:xfrm>
+            <a:off x="7178262" y="4013883"/>
+            <a:ext cx="762000" cy="298450"/>
+          </a:xfrm>
+          <a:prstGeom prst="line">
+            <a:avLst/>
+          </a:prstGeom>
+        </p:spPr>
+        <p:style>
+          <a:lnRef idx="2">
+            <a:schemeClr val="dk1"/>
+          </a:lnRef>
+          <a:fillRef idx="0">
+            <a:schemeClr val="dk1"/>
+          </a:fillRef>
+          <a:effectRef idx="1">
+            <a:schemeClr val="dk1"/>
+          </a:effectRef>
+          <a:fontRef idx="minor">
+            <a:schemeClr val="tx1"/>
+          </a:fontRef>
+        </p:style>
+      </p:cxnSp>
+      <p:cxnSp>
+        <p:nvCxnSpPr>
+          <p:cNvPr id="19" name="直線コネクタ 18">
+            <a:extLst>
+              <a:ext uri="{FF2B5EF4-FFF2-40B4-BE49-F238E27FC236}">
+                <a16:creationId xmlns:a16="http://schemas.microsoft.com/office/drawing/2014/main" id="{4B4CABB6-82C4-F0BF-5A69-F27457750FFB}"/>
+              </a:ext>
+            </a:extLst>
+          </p:cNvPr>
+          <p:cNvCxnSpPr>
+            <a:cxnSpLocks/>
+            <a:endCxn id="16" idx="0"/>
+          </p:cNvCxnSpPr>
+          <p:nvPr/>
+        </p:nvCxnSpPr>
+        <p:spPr>
+          <a:xfrm>
+            <a:off x="9387205" y="3785630"/>
+            <a:ext cx="749003" cy="112126"/>
+          </a:xfrm>
+          <a:prstGeom prst="line">
+            <a:avLst/>
+          </a:prstGeom>
+        </p:spPr>
+        <p:style>
+          <a:lnRef idx="2">
+            <a:schemeClr val="dk1"/>
+          </a:lnRef>
+          <a:fillRef idx="0">
+            <a:schemeClr val="dk1"/>
+          </a:fillRef>
+          <a:effectRef idx="1">
+            <a:schemeClr val="dk1"/>
+          </a:effectRef>
+          <a:fontRef idx="minor">
+            <a:schemeClr val="tx1"/>
+          </a:fontRef>
+        </p:style>
+      </p:cxnSp>
+    </p:spTree>
+    <p:extLst>
+      <p:ext uri="{BB962C8B-B14F-4D97-AF65-F5344CB8AC3E}">
+        <p14:creationId xmlns:p14="http://schemas.microsoft.com/office/powerpoint/2010/main" val="3165368094"/>
       </p:ext>
     </p:extLst>
   </p:cSld>
@@ -3644,6 +5494,126 @@
           <a:chExt cx="0" cy="0"/>
         </a:xfrm>
       </p:grpSpPr>
+      <p:pic>
+        <p:nvPicPr>
+          <p:cNvPr id="3" name="図 2">
+            <a:extLst>
+              <a:ext uri="{FF2B5EF4-FFF2-40B4-BE49-F238E27FC236}">
+                <a16:creationId xmlns:a16="http://schemas.microsoft.com/office/drawing/2014/main" id="{3082A2BD-8936-9C39-CB44-78310B92BB54}"/>
+              </a:ext>
+            </a:extLst>
+          </p:cNvPr>
+          <p:cNvPicPr>
+            <a:picLocks noChangeAspect="1"/>
+          </p:cNvPicPr>
+          <p:nvPr/>
+        </p:nvPicPr>
+        <p:blipFill>
+          <a:blip r:embed="rId2"/>
+          <a:stretch>
+            <a:fillRect/>
+          </a:stretch>
+        </p:blipFill>
+        <p:spPr>
+          <a:xfrm>
+            <a:off x="800452" y="-19627"/>
+            <a:ext cx="5295548" cy="3448627"/>
+          </a:xfrm>
+          <a:prstGeom prst="rect">
+            <a:avLst/>
+          </a:prstGeom>
+        </p:spPr>
+      </p:pic>
+      <p:pic>
+        <p:nvPicPr>
+          <p:cNvPr id="5" name="図 4">
+            <a:extLst>
+              <a:ext uri="{FF2B5EF4-FFF2-40B4-BE49-F238E27FC236}">
+                <a16:creationId xmlns:a16="http://schemas.microsoft.com/office/drawing/2014/main" id="{A53A4E7C-7518-F5BB-B1E3-B390C1EE569E}"/>
+              </a:ext>
+            </a:extLst>
+          </p:cNvPr>
+          <p:cNvPicPr>
+            <a:picLocks noChangeAspect="1"/>
+          </p:cNvPicPr>
+          <p:nvPr/>
+        </p:nvPicPr>
+        <p:blipFill>
+          <a:blip r:embed="rId3"/>
+          <a:stretch>
+            <a:fillRect/>
+          </a:stretch>
+        </p:blipFill>
+        <p:spPr>
+          <a:xfrm>
+            <a:off x="6096000" y="-19628"/>
+            <a:ext cx="5295548" cy="3448627"/>
+          </a:xfrm>
+          <a:prstGeom prst="rect">
+            <a:avLst/>
+          </a:prstGeom>
+        </p:spPr>
+      </p:pic>
+      <p:pic>
+        <p:nvPicPr>
+          <p:cNvPr id="7" name="図 6">
+            <a:extLst>
+              <a:ext uri="{FF2B5EF4-FFF2-40B4-BE49-F238E27FC236}">
+                <a16:creationId xmlns:a16="http://schemas.microsoft.com/office/drawing/2014/main" id="{C0CCF536-9080-4C32-B0AB-37C443CEA9FF}"/>
+              </a:ext>
+            </a:extLst>
+          </p:cNvPr>
+          <p:cNvPicPr>
+            <a:picLocks noChangeAspect="1"/>
+          </p:cNvPicPr>
+          <p:nvPr/>
+        </p:nvPicPr>
+        <p:blipFill>
+          <a:blip r:embed="rId4"/>
+          <a:stretch>
+            <a:fillRect/>
+          </a:stretch>
+        </p:blipFill>
+        <p:spPr>
+          <a:xfrm>
+            <a:off x="800452" y="3429000"/>
+            <a:ext cx="5295548" cy="3448627"/>
+          </a:xfrm>
+          <a:prstGeom prst="rect">
+            <a:avLst/>
+          </a:prstGeom>
+        </p:spPr>
+      </p:pic>
+      <p:pic>
+        <p:nvPicPr>
+          <p:cNvPr id="9" name="図 8">
+            <a:extLst>
+              <a:ext uri="{FF2B5EF4-FFF2-40B4-BE49-F238E27FC236}">
+                <a16:creationId xmlns:a16="http://schemas.microsoft.com/office/drawing/2014/main" id="{EF0B8D89-8A7D-2E12-72C9-8646CF685A00}"/>
+              </a:ext>
+            </a:extLst>
+          </p:cNvPr>
+          <p:cNvPicPr>
+            <a:picLocks noChangeAspect="1"/>
+          </p:cNvPicPr>
+          <p:nvPr/>
+        </p:nvPicPr>
+        <p:blipFill>
+          <a:blip r:embed="rId5"/>
+          <a:stretch>
+            <a:fillRect/>
+          </a:stretch>
+        </p:blipFill>
+        <p:spPr>
+          <a:xfrm>
+            <a:off x="6096000" y="3429000"/>
+            <a:ext cx="5295548" cy="3448627"/>
+          </a:xfrm>
+          <a:prstGeom prst="rect">
+            <a:avLst/>
+          </a:prstGeom>
+        </p:spPr>
+      </p:pic>
     </p:spTree>
     <p:extLst>
       <p:ext uri="{BB962C8B-B14F-4D97-AF65-F5344CB8AC3E}">
@@ -3674,6 +5644,104 @@
           <a:chExt cx="0" cy="0"/>
         </a:xfrm>
       </p:grpSpPr>
+      <p:pic>
+        <p:nvPicPr>
+          <p:cNvPr id="2" name="図 1">
+            <a:extLst>
+              <a:ext uri="{FF2B5EF4-FFF2-40B4-BE49-F238E27FC236}">
+                <a16:creationId xmlns:a16="http://schemas.microsoft.com/office/drawing/2014/main" id="{B342184C-020A-D33C-2954-BFB5616CC04B}"/>
+              </a:ext>
+            </a:extLst>
+          </p:cNvPr>
+          <p:cNvPicPr>
+            <a:picLocks noChangeAspect="1"/>
+          </p:cNvPicPr>
+          <p:nvPr/>
+        </p:nvPicPr>
+        <p:blipFill>
+          <a:blip r:embed="rId2"/>
+          <a:stretch>
+            <a:fillRect/>
+          </a:stretch>
+        </p:blipFill>
+        <p:spPr>
+          <a:xfrm>
+            <a:off x="2209800" y="894117"/>
+            <a:ext cx="7772400" cy="5069766"/>
+          </a:xfrm>
+          <a:prstGeom prst="rect">
+            <a:avLst/>
+          </a:prstGeom>
+        </p:spPr>
+      </p:pic>
+      <p:sp>
+        <p:nvSpPr>
+          <p:cNvPr id="3" name="テキスト ボックス 2">
+            <a:extLst>
+              <a:ext uri="{FF2B5EF4-FFF2-40B4-BE49-F238E27FC236}">
+                <a16:creationId xmlns:a16="http://schemas.microsoft.com/office/drawing/2014/main" id="{08127665-F072-96A7-3929-946F26EA805E}"/>
+              </a:ext>
+            </a:extLst>
+          </p:cNvPr>
+          <p:cNvSpPr txBox="1"/>
+          <p:nvPr/>
+        </p:nvSpPr>
+        <p:spPr>
+          <a:xfrm>
+            <a:off x="3534241" y="5963883"/>
+            <a:ext cx="5123518" cy="369332"/>
+          </a:xfrm>
+          <a:prstGeom prst="rect">
+            <a:avLst/>
+          </a:prstGeom>
+          <a:noFill/>
+        </p:spPr>
+        <p:txBody>
+          <a:bodyPr wrap="none" rtlCol="0">
+            <a:spAutoFit/>
+          </a:bodyPr>
+          <a:lstStyle/>
+          <a:p>
+            <a:r>
+              <a:rPr kumimoji="1" lang="ja-JP" altLang="en-US"/>
+              <a:t>図</a:t>
+            </a:r>
+            <a:r>
+              <a:rPr kumimoji="1" lang="en-US" altLang="ja-JP" dirty="0"/>
+              <a:t>2-1</a:t>
+            </a:r>
+            <a:r>
+              <a:rPr kumimoji="1" lang="ja-JP" altLang="en-US"/>
+              <a:t>　</a:t>
+            </a:r>
+            <a:r>
+              <a:rPr kumimoji="1" lang="en-US" altLang="ja-JP" dirty="0"/>
+              <a:t>2</a:t>
+            </a:r>
+            <a:r>
+              <a:rPr kumimoji="1" lang="ja-JP" altLang="en-US"/>
+              <a:t>値化画像の</a:t>
+            </a:r>
+            <a:r>
+              <a:rPr lang="ja-JP" altLang="en-US"/>
+              <a:t>出力結果</a:t>
+            </a:r>
+            <a:r>
+              <a:rPr lang="en-US" altLang="ja-JP" dirty="0"/>
+              <a:t>(</a:t>
+            </a:r>
+            <a:r>
+              <a:rPr lang="ja-JP" altLang="en-US"/>
+              <a:t>閾値</a:t>
+            </a:r>
+            <a:r>
+              <a:rPr lang="en-US" altLang="ja-JP" dirty="0"/>
+              <a:t>0, 20, 40, 60)</a:t>
+            </a:r>
+            <a:endParaRPr kumimoji="1" lang="ja-JP" altLang="en-US"/>
+          </a:p>
+        </p:txBody>
+      </p:sp>
     </p:spTree>
     <p:extLst>
       <p:ext uri="{BB962C8B-B14F-4D97-AF65-F5344CB8AC3E}">
@@ -3704,6 +5772,126 @@
           <a:chExt cx="0" cy="0"/>
         </a:xfrm>
       </p:grpSpPr>
+      <p:pic>
+        <p:nvPicPr>
+          <p:cNvPr id="3" name="図 2">
+            <a:extLst>
+              <a:ext uri="{FF2B5EF4-FFF2-40B4-BE49-F238E27FC236}">
+                <a16:creationId xmlns:a16="http://schemas.microsoft.com/office/drawing/2014/main" id="{1007A8AA-99FC-3D30-644F-EB9DAE9D90E5}"/>
+              </a:ext>
+            </a:extLst>
+          </p:cNvPr>
+          <p:cNvPicPr>
+            <a:picLocks noChangeAspect="1"/>
+          </p:cNvPicPr>
+          <p:nvPr/>
+        </p:nvPicPr>
+        <p:blipFill>
+          <a:blip r:embed="rId2"/>
+          <a:stretch>
+            <a:fillRect/>
+          </a:stretch>
+        </p:blipFill>
+        <p:spPr>
+          <a:xfrm>
+            <a:off x="830591" y="0"/>
+            <a:ext cx="5265409" cy="3429000"/>
+          </a:xfrm>
+          <a:prstGeom prst="rect">
+            <a:avLst/>
+          </a:prstGeom>
+        </p:spPr>
+      </p:pic>
+      <p:pic>
+        <p:nvPicPr>
+          <p:cNvPr id="5" name="図 4">
+            <a:extLst>
+              <a:ext uri="{FF2B5EF4-FFF2-40B4-BE49-F238E27FC236}">
+                <a16:creationId xmlns:a16="http://schemas.microsoft.com/office/drawing/2014/main" id="{74F45AC4-4D1E-5175-E3AE-EC6678094067}"/>
+              </a:ext>
+            </a:extLst>
+          </p:cNvPr>
+          <p:cNvPicPr>
+            <a:picLocks noChangeAspect="1"/>
+          </p:cNvPicPr>
+          <p:nvPr/>
+        </p:nvPicPr>
+        <p:blipFill>
+          <a:blip r:embed="rId3"/>
+          <a:stretch>
+            <a:fillRect/>
+          </a:stretch>
+        </p:blipFill>
+        <p:spPr>
+          <a:xfrm>
+            <a:off x="6096000" y="0"/>
+            <a:ext cx="5265409" cy="3429000"/>
+          </a:xfrm>
+          <a:prstGeom prst="rect">
+            <a:avLst/>
+          </a:prstGeom>
+        </p:spPr>
+      </p:pic>
+      <p:pic>
+        <p:nvPicPr>
+          <p:cNvPr id="7" name="図 6">
+            <a:extLst>
+              <a:ext uri="{FF2B5EF4-FFF2-40B4-BE49-F238E27FC236}">
+                <a16:creationId xmlns:a16="http://schemas.microsoft.com/office/drawing/2014/main" id="{3953AFF5-B746-8A11-5B9A-2E4C298A276F}"/>
+              </a:ext>
+            </a:extLst>
+          </p:cNvPr>
+          <p:cNvPicPr>
+            <a:picLocks noChangeAspect="1"/>
+          </p:cNvPicPr>
+          <p:nvPr/>
+        </p:nvPicPr>
+        <p:blipFill>
+          <a:blip r:embed="rId4"/>
+          <a:stretch>
+            <a:fillRect/>
+          </a:stretch>
+        </p:blipFill>
+        <p:spPr>
+          <a:xfrm>
+            <a:off x="830591" y="3429000"/>
+            <a:ext cx="5265409" cy="3429000"/>
+          </a:xfrm>
+          <a:prstGeom prst="rect">
+            <a:avLst/>
+          </a:prstGeom>
+        </p:spPr>
+      </p:pic>
+      <p:pic>
+        <p:nvPicPr>
+          <p:cNvPr id="9" name="図 8">
+            <a:extLst>
+              <a:ext uri="{FF2B5EF4-FFF2-40B4-BE49-F238E27FC236}">
+                <a16:creationId xmlns:a16="http://schemas.microsoft.com/office/drawing/2014/main" id="{33F92D1A-1F9E-CB09-5B4B-32DAFBCA5C36}"/>
+              </a:ext>
+            </a:extLst>
+          </p:cNvPr>
+          <p:cNvPicPr>
+            <a:picLocks noChangeAspect="1"/>
+          </p:cNvPicPr>
+          <p:nvPr/>
+        </p:nvPicPr>
+        <p:blipFill>
+          <a:blip r:embed="rId5"/>
+          <a:stretch>
+            <a:fillRect/>
+          </a:stretch>
+        </p:blipFill>
+        <p:spPr>
+          <a:xfrm>
+            <a:off x="6095999" y="3429000"/>
+            <a:ext cx="5265410" cy="3429000"/>
+          </a:xfrm>
+          <a:prstGeom prst="rect">
+            <a:avLst/>
+          </a:prstGeom>
+        </p:spPr>
+      </p:pic>
     </p:spTree>
     <p:extLst>
       <p:ext uri="{BB962C8B-B14F-4D97-AF65-F5344CB8AC3E}">
@@ -3734,6 +5922,104 @@
           <a:chExt cx="0" cy="0"/>
         </a:xfrm>
       </p:grpSpPr>
+      <p:pic>
+        <p:nvPicPr>
+          <p:cNvPr id="2" name="図 1">
+            <a:extLst>
+              <a:ext uri="{FF2B5EF4-FFF2-40B4-BE49-F238E27FC236}">
+                <a16:creationId xmlns:a16="http://schemas.microsoft.com/office/drawing/2014/main" id="{8CF7EFE8-D5A8-46A1-AB4C-B068CEF8A5DB}"/>
+              </a:ext>
+            </a:extLst>
+          </p:cNvPr>
+          <p:cNvPicPr>
+            <a:picLocks noChangeAspect="1"/>
+          </p:cNvPicPr>
+          <p:nvPr/>
+        </p:nvPicPr>
+        <p:blipFill>
+          <a:blip r:embed="rId2"/>
+          <a:stretch>
+            <a:fillRect/>
+          </a:stretch>
+        </p:blipFill>
+        <p:spPr>
+          <a:xfrm>
+            <a:off x="2209800" y="900629"/>
+            <a:ext cx="7772400" cy="5056742"/>
+          </a:xfrm>
+          <a:prstGeom prst="rect">
+            <a:avLst/>
+          </a:prstGeom>
+        </p:spPr>
+      </p:pic>
+      <p:sp>
+        <p:nvSpPr>
+          <p:cNvPr id="3" name="テキスト ボックス 2">
+            <a:extLst>
+              <a:ext uri="{FF2B5EF4-FFF2-40B4-BE49-F238E27FC236}">
+                <a16:creationId xmlns:a16="http://schemas.microsoft.com/office/drawing/2014/main" id="{D72A7C97-41D8-9D6B-A4E7-C176CC05CCEB}"/>
+              </a:ext>
+            </a:extLst>
+          </p:cNvPr>
+          <p:cNvSpPr txBox="1"/>
+          <p:nvPr/>
+        </p:nvSpPr>
+        <p:spPr>
+          <a:xfrm>
+            <a:off x="3277760" y="5957371"/>
+            <a:ext cx="5636479" cy="369332"/>
+          </a:xfrm>
+          <a:prstGeom prst="rect">
+            <a:avLst/>
+          </a:prstGeom>
+          <a:noFill/>
+        </p:spPr>
+        <p:txBody>
+          <a:bodyPr wrap="none" rtlCol="0">
+            <a:spAutoFit/>
+          </a:bodyPr>
+          <a:lstStyle/>
+          <a:p>
+            <a:r>
+              <a:rPr kumimoji="1" lang="ja-JP" altLang="en-US"/>
+              <a:t>図</a:t>
+            </a:r>
+            <a:r>
+              <a:rPr kumimoji="1" lang="en-US" altLang="ja-JP" dirty="0"/>
+              <a:t>2-2</a:t>
+            </a:r>
+            <a:r>
+              <a:rPr kumimoji="1" lang="ja-JP" altLang="en-US"/>
+              <a:t>　</a:t>
+            </a:r>
+            <a:r>
+              <a:rPr kumimoji="1" lang="en-US" altLang="ja-JP" dirty="0"/>
+              <a:t>2</a:t>
+            </a:r>
+            <a:r>
+              <a:rPr kumimoji="1" lang="ja-JP" altLang="en-US"/>
+              <a:t>値化画像の</a:t>
+            </a:r>
+            <a:r>
+              <a:rPr lang="ja-JP" altLang="en-US"/>
+              <a:t>出力結果</a:t>
+            </a:r>
+            <a:r>
+              <a:rPr lang="en-US" altLang="ja-JP" dirty="0"/>
+              <a:t>(</a:t>
+            </a:r>
+            <a:r>
+              <a:rPr lang="ja-JP" altLang="en-US"/>
+              <a:t>閾値</a:t>
+            </a:r>
+            <a:r>
+              <a:rPr lang="en-US" altLang="ja-JP" dirty="0"/>
+              <a:t>80, 100, 120, 140)</a:t>
+            </a:r>
+            <a:endParaRPr kumimoji="1" lang="ja-JP" altLang="en-US"/>
+          </a:p>
+        </p:txBody>
+      </p:sp>
     </p:spTree>
     <p:extLst>
       <p:ext uri="{BB962C8B-B14F-4D97-AF65-F5344CB8AC3E}">
@@ -3764,10 +6050,476 @@
           <a:chExt cx="0" cy="0"/>
         </a:xfrm>
       </p:grpSpPr>
+      <p:pic>
+        <p:nvPicPr>
+          <p:cNvPr id="3" name="図 2">
+            <a:extLst>
+              <a:ext uri="{FF2B5EF4-FFF2-40B4-BE49-F238E27FC236}">
+                <a16:creationId xmlns:a16="http://schemas.microsoft.com/office/drawing/2014/main" id="{78ECA450-9DFD-9229-A8FF-DA9DD49AE5B0}"/>
+              </a:ext>
+            </a:extLst>
+          </p:cNvPr>
+          <p:cNvPicPr>
+            <a:picLocks noChangeAspect="1"/>
+          </p:cNvPicPr>
+          <p:nvPr/>
+        </p:nvPicPr>
+        <p:blipFill>
+          <a:blip r:embed="rId2"/>
+          <a:stretch>
+            <a:fillRect/>
+          </a:stretch>
+        </p:blipFill>
+        <p:spPr>
+          <a:xfrm>
+            <a:off x="830591" y="0"/>
+            <a:ext cx="5265409" cy="3429000"/>
+          </a:xfrm>
+          <a:prstGeom prst="rect">
+            <a:avLst/>
+          </a:prstGeom>
+        </p:spPr>
+      </p:pic>
+      <p:pic>
+        <p:nvPicPr>
+          <p:cNvPr id="5" name="図 4">
+            <a:extLst>
+              <a:ext uri="{FF2B5EF4-FFF2-40B4-BE49-F238E27FC236}">
+                <a16:creationId xmlns:a16="http://schemas.microsoft.com/office/drawing/2014/main" id="{B4BE6848-F78D-D13D-07ED-2B73213CF251}"/>
+              </a:ext>
+            </a:extLst>
+          </p:cNvPr>
+          <p:cNvPicPr>
+            <a:picLocks noChangeAspect="1"/>
+          </p:cNvPicPr>
+          <p:nvPr/>
+        </p:nvPicPr>
+        <p:blipFill>
+          <a:blip r:embed="rId3"/>
+          <a:stretch>
+            <a:fillRect/>
+          </a:stretch>
+        </p:blipFill>
+        <p:spPr>
+          <a:xfrm>
+            <a:off x="6096000" y="0"/>
+            <a:ext cx="5265410" cy="3429000"/>
+          </a:xfrm>
+          <a:prstGeom prst="rect">
+            <a:avLst/>
+          </a:prstGeom>
+        </p:spPr>
+      </p:pic>
+      <p:pic>
+        <p:nvPicPr>
+          <p:cNvPr id="7" name="図 6">
+            <a:extLst>
+              <a:ext uri="{FF2B5EF4-FFF2-40B4-BE49-F238E27FC236}">
+                <a16:creationId xmlns:a16="http://schemas.microsoft.com/office/drawing/2014/main" id="{B6D4F9CD-A52F-39B7-6AB5-2BF22864385B}"/>
+              </a:ext>
+            </a:extLst>
+          </p:cNvPr>
+          <p:cNvPicPr>
+            <a:picLocks noChangeAspect="1"/>
+          </p:cNvPicPr>
+          <p:nvPr/>
+        </p:nvPicPr>
+        <p:blipFill>
+          <a:blip r:embed="rId4"/>
+          <a:stretch>
+            <a:fillRect/>
+          </a:stretch>
+        </p:blipFill>
+        <p:spPr>
+          <a:xfrm>
+            <a:off x="830590" y="3429000"/>
+            <a:ext cx="5265409" cy="3429000"/>
+          </a:xfrm>
+          <a:prstGeom prst="rect">
+            <a:avLst/>
+          </a:prstGeom>
+        </p:spPr>
+      </p:pic>
+      <p:pic>
+        <p:nvPicPr>
+          <p:cNvPr id="9" name="図 8">
+            <a:extLst>
+              <a:ext uri="{FF2B5EF4-FFF2-40B4-BE49-F238E27FC236}">
+                <a16:creationId xmlns:a16="http://schemas.microsoft.com/office/drawing/2014/main" id="{F8196E28-6965-F8D3-8A91-F9ECA0569AC1}"/>
+              </a:ext>
+            </a:extLst>
+          </p:cNvPr>
+          <p:cNvPicPr>
+            <a:picLocks noChangeAspect="1"/>
+          </p:cNvPicPr>
+          <p:nvPr/>
+        </p:nvPicPr>
+        <p:blipFill>
+          <a:blip r:embed="rId5"/>
+          <a:stretch>
+            <a:fillRect/>
+          </a:stretch>
+        </p:blipFill>
+        <p:spPr>
+          <a:xfrm>
+            <a:off x="6096000" y="3429000"/>
+            <a:ext cx="5265410" cy="3429000"/>
+          </a:xfrm>
+          <a:prstGeom prst="rect">
+            <a:avLst/>
+          </a:prstGeom>
+        </p:spPr>
+      </p:pic>
     </p:spTree>
     <p:extLst>
       <p:ext uri="{BB962C8B-B14F-4D97-AF65-F5344CB8AC3E}">
         <p14:creationId xmlns:p14="http://schemas.microsoft.com/office/powerpoint/2010/main" val="2998140654"/>
+      </p:ext>
+    </p:extLst>
+  </p:cSld>
+  <p:clrMapOvr>
+    <a:masterClrMapping/>
+  </p:clrMapOvr>
+</p:sld>
+</file>
+
+<file path=ppt/slides/slide7.xml><?xml version="1.0" encoding="utf-8"?>
+<p:sld xmlns:a="http://schemas.openxmlformats.org/drawingml/2006/main" xmlns:r="http://schemas.openxmlformats.org/officeDocument/2006/relationships" xmlns:p="http://schemas.openxmlformats.org/presentationml/2006/main">
+  <p:cSld>
+    <p:spTree>
+      <p:nvGrpSpPr>
+        <p:cNvPr id="1" name=""/>
+        <p:cNvGrpSpPr/>
+        <p:nvPr/>
+      </p:nvGrpSpPr>
+      <p:grpSpPr>
+        <a:xfrm>
+          <a:off x="0" y="0"/>
+          <a:ext cx="0" cy="0"/>
+          <a:chOff x="0" y="0"/>
+          <a:chExt cx="0" cy="0"/>
+        </a:xfrm>
+      </p:grpSpPr>
+      <p:pic>
+        <p:nvPicPr>
+          <p:cNvPr id="2" name="図 1">
+            <a:extLst>
+              <a:ext uri="{FF2B5EF4-FFF2-40B4-BE49-F238E27FC236}">
+                <a16:creationId xmlns:a16="http://schemas.microsoft.com/office/drawing/2014/main" id="{112145FB-B160-E19F-A04A-4847A333CBF0}"/>
+              </a:ext>
+            </a:extLst>
+          </p:cNvPr>
+          <p:cNvPicPr>
+            <a:picLocks noChangeAspect="1"/>
+          </p:cNvPicPr>
+          <p:nvPr/>
+        </p:nvPicPr>
+        <p:blipFill>
+          <a:blip r:embed="rId2"/>
+          <a:stretch>
+            <a:fillRect/>
+          </a:stretch>
+        </p:blipFill>
+        <p:spPr>
+          <a:xfrm>
+            <a:off x="2209800" y="900629"/>
+            <a:ext cx="7772400" cy="5056742"/>
+          </a:xfrm>
+          <a:prstGeom prst="rect">
+            <a:avLst/>
+          </a:prstGeom>
+        </p:spPr>
+      </p:pic>
+      <p:sp>
+        <p:nvSpPr>
+          <p:cNvPr id="3" name="テキスト ボックス 2">
+            <a:extLst>
+              <a:ext uri="{FF2B5EF4-FFF2-40B4-BE49-F238E27FC236}">
+                <a16:creationId xmlns:a16="http://schemas.microsoft.com/office/drawing/2014/main" id="{BE5C212F-2344-D682-E2D3-AC98CA8FA6F0}"/>
+              </a:ext>
+            </a:extLst>
+          </p:cNvPr>
+          <p:cNvSpPr txBox="1"/>
+          <p:nvPr/>
+        </p:nvSpPr>
+        <p:spPr>
+          <a:xfrm>
+            <a:off x="3213640" y="5983842"/>
+            <a:ext cx="5764720" cy="369332"/>
+          </a:xfrm>
+          <a:prstGeom prst="rect">
+            <a:avLst/>
+          </a:prstGeom>
+          <a:noFill/>
+        </p:spPr>
+        <p:txBody>
+          <a:bodyPr wrap="none" rtlCol="0">
+            <a:spAutoFit/>
+          </a:bodyPr>
+          <a:lstStyle/>
+          <a:p>
+            <a:r>
+              <a:rPr kumimoji="1" lang="ja-JP" altLang="en-US"/>
+              <a:t>図</a:t>
+            </a:r>
+            <a:r>
+              <a:rPr kumimoji="1" lang="en-US" altLang="ja-JP" dirty="0"/>
+              <a:t>2-3</a:t>
+            </a:r>
+            <a:r>
+              <a:rPr kumimoji="1" lang="ja-JP" altLang="en-US"/>
+              <a:t>　</a:t>
+            </a:r>
+            <a:r>
+              <a:rPr kumimoji="1" lang="en-US" altLang="ja-JP" dirty="0"/>
+              <a:t>2</a:t>
+            </a:r>
+            <a:r>
+              <a:rPr kumimoji="1" lang="ja-JP" altLang="en-US"/>
+              <a:t>値化画像の</a:t>
+            </a:r>
+            <a:r>
+              <a:rPr lang="ja-JP" altLang="en-US"/>
+              <a:t>出力結果</a:t>
+            </a:r>
+            <a:r>
+              <a:rPr lang="en-US" altLang="ja-JP" dirty="0"/>
+              <a:t>(</a:t>
+            </a:r>
+            <a:r>
+              <a:rPr lang="ja-JP" altLang="en-US"/>
+              <a:t>閾値</a:t>
+            </a:r>
+            <a:r>
+              <a:rPr lang="en-US" altLang="ja-JP" dirty="0"/>
+              <a:t>160, 180, 200, 220)</a:t>
+            </a:r>
+            <a:endParaRPr kumimoji="1" lang="ja-JP" altLang="en-US"/>
+          </a:p>
+        </p:txBody>
+      </p:sp>
+    </p:spTree>
+    <p:extLst>
+      <p:ext uri="{BB962C8B-B14F-4D97-AF65-F5344CB8AC3E}">
+        <p14:creationId xmlns:p14="http://schemas.microsoft.com/office/powerpoint/2010/main" val="341272926"/>
+      </p:ext>
+    </p:extLst>
+  </p:cSld>
+  <p:clrMapOvr>
+    <a:masterClrMapping/>
+  </p:clrMapOvr>
+</p:sld>
+</file>
+
+<file path=ppt/slides/slide8.xml><?xml version="1.0" encoding="utf-8"?>
+<p:sld xmlns:a="http://schemas.openxmlformats.org/drawingml/2006/main" xmlns:r="http://schemas.openxmlformats.org/officeDocument/2006/relationships" xmlns:p="http://schemas.openxmlformats.org/presentationml/2006/main">
+  <p:cSld>
+    <p:spTree>
+      <p:nvGrpSpPr>
+        <p:cNvPr id="1" name=""/>
+        <p:cNvGrpSpPr/>
+        <p:nvPr/>
+      </p:nvGrpSpPr>
+      <p:grpSpPr>
+        <a:xfrm>
+          <a:off x="0" y="0"/>
+          <a:ext cx="0" cy="0"/>
+          <a:chOff x="0" y="0"/>
+          <a:chExt cx="0" cy="0"/>
+        </a:xfrm>
+      </p:grpSpPr>
+      <p:pic>
+        <p:nvPicPr>
+          <p:cNvPr id="3" name="図 2">
+            <a:extLst>
+              <a:ext uri="{FF2B5EF4-FFF2-40B4-BE49-F238E27FC236}">
+                <a16:creationId xmlns:a16="http://schemas.microsoft.com/office/drawing/2014/main" id="{500E0219-663C-B476-FB7D-68617FCEF622}"/>
+              </a:ext>
+            </a:extLst>
+          </p:cNvPr>
+          <p:cNvPicPr>
+            <a:picLocks noChangeAspect="1"/>
+          </p:cNvPicPr>
+          <p:nvPr/>
+        </p:nvPicPr>
+        <p:blipFill>
+          <a:blip r:embed="rId2"/>
+          <a:stretch>
+            <a:fillRect/>
+          </a:stretch>
+        </p:blipFill>
+        <p:spPr>
+          <a:xfrm>
+            <a:off x="830591" y="1714500"/>
+            <a:ext cx="5265409" cy="3429000"/>
+          </a:xfrm>
+          <a:prstGeom prst="rect">
+            <a:avLst/>
+          </a:prstGeom>
+        </p:spPr>
+      </p:pic>
+      <p:pic>
+        <p:nvPicPr>
+          <p:cNvPr id="7" name="図 6">
+            <a:extLst>
+              <a:ext uri="{FF2B5EF4-FFF2-40B4-BE49-F238E27FC236}">
+                <a16:creationId xmlns:a16="http://schemas.microsoft.com/office/drawing/2014/main" id="{5AC33ADB-5FB2-77B4-F427-025C06461402}"/>
+              </a:ext>
+            </a:extLst>
+          </p:cNvPr>
+          <p:cNvPicPr>
+            <a:picLocks noChangeAspect="1"/>
+          </p:cNvPicPr>
+          <p:nvPr/>
+        </p:nvPicPr>
+        <p:blipFill>
+          <a:blip r:embed="rId3"/>
+          <a:stretch>
+            <a:fillRect/>
+          </a:stretch>
+        </p:blipFill>
+        <p:spPr>
+          <a:xfrm>
+            <a:off x="6096001" y="1714500"/>
+            <a:ext cx="5265409" cy="3429000"/>
+          </a:xfrm>
+          <a:prstGeom prst="rect">
+            <a:avLst/>
+          </a:prstGeom>
+        </p:spPr>
+      </p:pic>
+    </p:spTree>
+    <p:extLst>
+      <p:ext uri="{BB962C8B-B14F-4D97-AF65-F5344CB8AC3E}">
+        <p14:creationId xmlns:p14="http://schemas.microsoft.com/office/powerpoint/2010/main" val="129344649"/>
+      </p:ext>
+    </p:extLst>
+  </p:cSld>
+  <p:clrMapOvr>
+    <a:masterClrMapping/>
+  </p:clrMapOvr>
+</p:sld>
+</file>
+
+<file path=ppt/slides/slide9.xml><?xml version="1.0" encoding="utf-8"?>
+<p:sld xmlns:a="http://schemas.openxmlformats.org/drawingml/2006/main" xmlns:r="http://schemas.openxmlformats.org/officeDocument/2006/relationships" xmlns:p="http://schemas.openxmlformats.org/presentationml/2006/main">
+  <p:cSld>
+    <p:spTree>
+      <p:nvGrpSpPr>
+        <p:cNvPr id="1" name=""/>
+        <p:cNvGrpSpPr/>
+        <p:nvPr/>
+      </p:nvGrpSpPr>
+      <p:grpSpPr>
+        <a:xfrm>
+          <a:off x="0" y="0"/>
+          <a:ext cx="0" cy="0"/>
+          <a:chOff x="0" y="0"/>
+          <a:chExt cx="0" cy="0"/>
+        </a:xfrm>
+      </p:grpSpPr>
+      <p:sp>
+        <p:nvSpPr>
+          <p:cNvPr id="3" name="テキスト ボックス 2">
+            <a:extLst>
+              <a:ext uri="{FF2B5EF4-FFF2-40B4-BE49-F238E27FC236}">
+                <a16:creationId xmlns:a16="http://schemas.microsoft.com/office/drawing/2014/main" id="{A6BF6BC0-1D34-E587-B05C-68E47621F0A9}"/>
+              </a:ext>
+            </a:extLst>
+          </p:cNvPr>
+          <p:cNvSpPr txBox="1"/>
+          <p:nvPr/>
+        </p:nvSpPr>
+        <p:spPr>
+          <a:xfrm>
+            <a:off x="3723395" y="4693185"/>
+            <a:ext cx="4745210" cy="369332"/>
+          </a:xfrm>
+          <a:prstGeom prst="rect">
+            <a:avLst/>
+          </a:prstGeom>
+          <a:noFill/>
+        </p:spPr>
+        <p:txBody>
+          <a:bodyPr wrap="none" rtlCol="0">
+            <a:spAutoFit/>
+          </a:bodyPr>
+          <a:lstStyle/>
+          <a:p>
+            <a:r>
+              <a:rPr kumimoji="1" lang="ja-JP" altLang="en-US"/>
+              <a:t>図</a:t>
+            </a:r>
+            <a:r>
+              <a:rPr kumimoji="1" lang="en-US" altLang="ja-JP" dirty="0"/>
+              <a:t>2-4</a:t>
+            </a:r>
+            <a:r>
+              <a:rPr kumimoji="1" lang="ja-JP" altLang="en-US"/>
+              <a:t>　</a:t>
+            </a:r>
+            <a:r>
+              <a:rPr kumimoji="1" lang="en-US" altLang="ja-JP" dirty="0"/>
+              <a:t>2</a:t>
+            </a:r>
+            <a:r>
+              <a:rPr kumimoji="1" lang="ja-JP" altLang="en-US"/>
+              <a:t>値化画像の</a:t>
+            </a:r>
+            <a:r>
+              <a:rPr lang="ja-JP" altLang="en-US"/>
+              <a:t>出力結果</a:t>
+            </a:r>
+            <a:r>
+              <a:rPr lang="en-US" altLang="ja-JP" dirty="0"/>
+              <a:t>(</a:t>
+            </a:r>
+            <a:r>
+              <a:rPr lang="ja-JP" altLang="en-US"/>
+              <a:t>閾値</a:t>
+            </a:r>
+            <a:r>
+              <a:rPr lang="en-US" altLang="ja-JP" dirty="0"/>
+              <a:t>240, 255)</a:t>
+            </a:r>
+            <a:endParaRPr kumimoji="1" lang="ja-JP" altLang="en-US"/>
+          </a:p>
+        </p:txBody>
+      </p:sp>
+      <p:pic>
+        <p:nvPicPr>
+          <p:cNvPr id="4" name="図 3">
+            <a:extLst>
+              <a:ext uri="{FF2B5EF4-FFF2-40B4-BE49-F238E27FC236}">
+                <a16:creationId xmlns:a16="http://schemas.microsoft.com/office/drawing/2014/main" id="{BA0F4BEB-9378-009F-8AA3-79C8B7E73451}"/>
+              </a:ext>
+            </a:extLst>
+          </p:cNvPr>
+          <p:cNvPicPr>
+            <a:picLocks noChangeAspect="1"/>
+          </p:cNvPicPr>
+          <p:nvPr/>
+        </p:nvPicPr>
+        <p:blipFill>
+          <a:blip r:embed="rId2"/>
+          <a:stretch>
+            <a:fillRect/>
+          </a:stretch>
+        </p:blipFill>
+        <p:spPr>
+          <a:xfrm>
+            <a:off x="2209800" y="2164814"/>
+            <a:ext cx="7772400" cy="2528371"/>
+          </a:xfrm>
+          <a:prstGeom prst="rect">
+            <a:avLst/>
+          </a:prstGeom>
+        </p:spPr>
+      </p:pic>
+    </p:spTree>
+    <p:extLst>
+      <p:ext uri="{BB962C8B-B14F-4D97-AF65-F5344CB8AC3E}">
+        <p14:creationId xmlns:p14="http://schemas.microsoft.com/office/powerpoint/2010/main" val="3470371386"/>
       </p:ext>
     </p:extLst>
   </p:cSld>

--- a/latex/lec5/report_2412747_5.pptx
+++ b/latex/lec5/report_2412747_5.pptx
@@ -15,8 +15,10 @@
     <p:sldId id="264" r:id="rId9"/>
     <p:sldId id="265" r:id="rId10"/>
     <p:sldId id="266" r:id="rId11"/>
-    <p:sldId id="267" r:id="rId12"/>
-    <p:sldId id="268" r:id="rId13"/>
+    <p:sldId id="269" r:id="rId12"/>
+    <p:sldId id="267" r:id="rId13"/>
+    <p:sldId id="268" r:id="rId14"/>
+    <p:sldId id="270" r:id="rId15"/>
   </p:sldIdLst>
   <p:sldSz cx="12192000" cy="6858000"/>
   <p:notesSz cx="6858000" cy="9144000"/>
@@ -270,7 +272,7 @@
           <a:p>
             <a:fld id="{8AE69D1F-A7D1-C145-9DA5-1F881D0B5FF8}" type="datetimeFigureOut">
               <a:rPr kumimoji="1" lang="ja-JP" altLang="en-US" smtClean="0"/>
-              <a:t>2026/5/9</a:t>
+              <a:t>2026/5/14</a:t>
             </a:fld>
             <a:endParaRPr kumimoji="1" lang="ja-JP" altLang="en-US"/>
           </a:p>
@@ -500,7 +502,7 @@
           <a:p>
             <a:fld id="{8AE69D1F-A7D1-C145-9DA5-1F881D0B5FF8}" type="datetimeFigureOut">
               <a:rPr kumimoji="1" lang="ja-JP" altLang="en-US" smtClean="0"/>
-              <a:t>2026/5/9</a:t>
+              <a:t>2026/5/14</a:t>
             </a:fld>
             <a:endParaRPr kumimoji="1" lang="ja-JP" altLang="en-US"/>
           </a:p>
@@ -740,7 +742,7 @@
           <a:p>
             <a:fld id="{8AE69D1F-A7D1-C145-9DA5-1F881D0B5FF8}" type="datetimeFigureOut">
               <a:rPr kumimoji="1" lang="ja-JP" altLang="en-US" smtClean="0"/>
-              <a:t>2026/5/9</a:t>
+              <a:t>2026/5/14</a:t>
             </a:fld>
             <a:endParaRPr kumimoji="1" lang="ja-JP" altLang="en-US"/>
           </a:p>
@@ -970,7 +972,7 @@
           <a:p>
             <a:fld id="{8AE69D1F-A7D1-C145-9DA5-1F881D0B5FF8}" type="datetimeFigureOut">
               <a:rPr kumimoji="1" lang="ja-JP" altLang="en-US" smtClean="0"/>
-              <a:t>2026/5/9</a:t>
+              <a:t>2026/5/14</a:t>
             </a:fld>
             <a:endParaRPr kumimoji="1" lang="ja-JP" altLang="en-US"/>
           </a:p>
@@ -1245,7 +1247,7 @@
           <a:p>
             <a:fld id="{8AE69D1F-A7D1-C145-9DA5-1F881D0B5FF8}" type="datetimeFigureOut">
               <a:rPr kumimoji="1" lang="ja-JP" altLang="en-US" smtClean="0"/>
-              <a:t>2026/5/9</a:t>
+              <a:t>2026/5/14</a:t>
             </a:fld>
             <a:endParaRPr kumimoji="1" lang="ja-JP" altLang="en-US"/>
           </a:p>
@@ -1574,7 +1576,7 @@
           <a:p>
             <a:fld id="{8AE69D1F-A7D1-C145-9DA5-1F881D0B5FF8}" type="datetimeFigureOut">
               <a:rPr kumimoji="1" lang="ja-JP" altLang="en-US" smtClean="0"/>
-              <a:t>2026/5/9</a:t>
+              <a:t>2026/5/14</a:t>
             </a:fld>
             <a:endParaRPr kumimoji="1" lang="ja-JP" altLang="en-US"/>
           </a:p>
@@ -2050,7 +2052,7 @@
           <a:p>
             <a:fld id="{8AE69D1F-A7D1-C145-9DA5-1F881D0B5FF8}" type="datetimeFigureOut">
               <a:rPr kumimoji="1" lang="ja-JP" altLang="en-US" smtClean="0"/>
-              <a:t>2026/5/9</a:t>
+              <a:t>2026/5/14</a:t>
             </a:fld>
             <a:endParaRPr kumimoji="1" lang="ja-JP" altLang="en-US"/>
           </a:p>
@@ -2191,7 +2193,7 @@
           <a:p>
             <a:fld id="{8AE69D1F-A7D1-C145-9DA5-1F881D0B5FF8}" type="datetimeFigureOut">
               <a:rPr kumimoji="1" lang="ja-JP" altLang="en-US" smtClean="0"/>
-              <a:t>2026/5/9</a:t>
+              <a:t>2026/5/14</a:t>
             </a:fld>
             <a:endParaRPr kumimoji="1" lang="ja-JP" altLang="en-US"/>
           </a:p>
@@ -2304,7 +2306,7 @@
           <a:p>
             <a:fld id="{8AE69D1F-A7D1-C145-9DA5-1F881D0B5FF8}" type="datetimeFigureOut">
               <a:rPr kumimoji="1" lang="ja-JP" altLang="en-US" smtClean="0"/>
-              <a:t>2026/5/9</a:t>
+              <a:t>2026/5/14</a:t>
             </a:fld>
             <a:endParaRPr kumimoji="1" lang="ja-JP" altLang="en-US"/>
           </a:p>
@@ -2647,7 +2649,7 @@
           <a:p>
             <a:fld id="{8AE69D1F-A7D1-C145-9DA5-1F881D0B5FF8}" type="datetimeFigureOut">
               <a:rPr kumimoji="1" lang="ja-JP" altLang="en-US" smtClean="0"/>
-              <a:t>2026/5/9</a:t>
+              <a:t>2026/5/14</a:t>
             </a:fld>
             <a:endParaRPr kumimoji="1" lang="ja-JP" altLang="en-US"/>
           </a:p>
@@ -2935,7 +2937,7 @@
           <a:p>
             <a:fld id="{8AE69D1F-A7D1-C145-9DA5-1F881D0B5FF8}" type="datetimeFigureOut">
               <a:rPr kumimoji="1" lang="ja-JP" altLang="en-US" smtClean="0"/>
-              <a:t>2026/5/9</a:t>
+              <a:t>2026/5/14</a:t>
             </a:fld>
             <a:endParaRPr kumimoji="1" lang="ja-JP" altLang="en-US"/>
           </a:p>
@@ -3208,7 +3210,7 @@
           <a:p>
             <a:fld id="{8AE69D1F-A7D1-C145-9DA5-1F881D0B5FF8}" type="datetimeFigureOut">
               <a:rPr kumimoji="1" lang="ja-JP" altLang="en-US" smtClean="0"/>
-              <a:t>2026/5/9</a:t>
+              <a:t>2026/5/14</a:t>
             </a:fld>
             <a:endParaRPr kumimoji="1" lang="ja-JP" altLang="en-US"/>
           </a:p>
@@ -3736,6 +3738,87 @@
           <a:chExt cx="0" cy="0"/>
         </a:xfrm>
       </p:grpSpPr>
+      <p:pic>
+        <p:nvPicPr>
+          <p:cNvPr id="3" name="図 2">
+            <a:extLst>
+              <a:ext uri="{FF2B5EF4-FFF2-40B4-BE49-F238E27FC236}">
+                <a16:creationId xmlns:a16="http://schemas.microsoft.com/office/drawing/2014/main" id="{C782E4FC-66B5-0339-A4DE-E88E49274B56}"/>
+              </a:ext>
+            </a:extLst>
+          </p:cNvPr>
+          <p:cNvPicPr>
+            <a:picLocks noChangeAspect="1"/>
+          </p:cNvPicPr>
+          <p:nvPr/>
+        </p:nvPicPr>
+        <p:blipFill>
+          <a:blip r:embed="rId2"/>
+          <a:stretch>
+            <a:fillRect/>
+          </a:stretch>
+        </p:blipFill>
+        <p:spPr>
+          <a:xfrm>
+            <a:off x="3778250" y="2914650"/>
+            <a:ext cx="4635500" cy="1028700"/>
+          </a:xfrm>
+          <a:prstGeom prst="rect">
+            <a:avLst/>
+          </a:prstGeom>
+        </p:spPr>
+      </p:pic>
+      <p:sp>
+        <p:nvSpPr>
+          <p:cNvPr id="4" name="テキスト ボックス 3">
+            <a:extLst>
+              <a:ext uri="{FF2B5EF4-FFF2-40B4-BE49-F238E27FC236}">
+                <a16:creationId xmlns:a16="http://schemas.microsoft.com/office/drawing/2014/main" id="{F93503EB-53D4-E3E5-6A01-CF0BDA0A029F}"/>
+              </a:ext>
+            </a:extLst>
+          </p:cNvPr>
+          <p:cNvSpPr txBox="1"/>
+          <p:nvPr/>
+        </p:nvSpPr>
+        <p:spPr>
+          <a:xfrm>
+            <a:off x="4836681" y="3943350"/>
+            <a:ext cx="2518638" cy="369332"/>
+          </a:xfrm>
+          <a:prstGeom prst="rect">
+            <a:avLst/>
+          </a:prstGeom>
+          <a:noFill/>
+        </p:spPr>
+        <p:txBody>
+          <a:bodyPr wrap="none" rtlCol="0">
+            <a:spAutoFit/>
+          </a:bodyPr>
+          <a:lstStyle/>
+          <a:p>
+            <a:r>
+              <a:rPr kumimoji="1" lang="ja-JP" altLang="en-US"/>
+              <a:t>図</a:t>
+            </a:r>
+            <a:r>
+              <a:rPr kumimoji="1" lang="en-US" altLang="ja-JP" dirty="0"/>
+              <a:t>3</a:t>
+            </a:r>
+            <a:r>
+              <a:rPr kumimoji="1" lang="ja-JP" altLang="en-US"/>
+              <a:t>　問題</a:t>
+            </a:r>
+            <a:r>
+              <a:rPr kumimoji="1" lang="en-US" altLang="ja-JP" dirty="0"/>
+              <a:t>3</a:t>
+            </a:r>
+            <a:r>
+              <a:rPr kumimoji="1" lang="ja-JP" altLang="en-US"/>
+              <a:t>の実行結果</a:t>
+            </a:r>
+          </a:p>
+        </p:txBody>
+      </p:sp>
     </p:spTree>
     <p:extLst>
       <p:ext uri="{BB962C8B-B14F-4D97-AF65-F5344CB8AC3E}">
@@ -3771,6 +3854,126 @@
           <p:cNvPr id="3" name="図 2">
             <a:extLst>
               <a:ext uri="{FF2B5EF4-FFF2-40B4-BE49-F238E27FC236}">
+                <a16:creationId xmlns:a16="http://schemas.microsoft.com/office/drawing/2014/main" id="{7079D8CF-0775-02CA-7D55-8334DADAA89D}"/>
+              </a:ext>
+            </a:extLst>
+          </p:cNvPr>
+          <p:cNvPicPr>
+            <a:picLocks noChangeAspect="1"/>
+          </p:cNvPicPr>
+          <p:nvPr/>
+        </p:nvPicPr>
+        <p:blipFill>
+          <a:blip r:embed="rId2"/>
+          <a:stretch>
+            <a:fillRect/>
+          </a:stretch>
+        </p:blipFill>
+        <p:spPr>
+          <a:xfrm>
+            <a:off x="3924300" y="850900"/>
+            <a:ext cx="4343400" cy="5156200"/>
+          </a:xfrm>
+          <a:prstGeom prst="rect">
+            <a:avLst/>
+          </a:prstGeom>
+        </p:spPr>
+      </p:pic>
+      <p:sp>
+        <p:nvSpPr>
+          <p:cNvPr id="4" name="テキスト ボックス 3">
+            <a:extLst>
+              <a:ext uri="{FF2B5EF4-FFF2-40B4-BE49-F238E27FC236}">
+                <a16:creationId xmlns:a16="http://schemas.microsoft.com/office/drawing/2014/main" id="{4F1134B4-5AF4-67B2-EACA-6BFEB42EA1D9}"/>
+              </a:ext>
+            </a:extLst>
+          </p:cNvPr>
+          <p:cNvSpPr txBox="1"/>
+          <p:nvPr/>
+        </p:nvSpPr>
+        <p:spPr>
+          <a:xfrm>
+            <a:off x="3924300" y="6007100"/>
+            <a:ext cx="4055919" cy="369332"/>
+          </a:xfrm>
+          <a:prstGeom prst="rect">
+            <a:avLst/>
+          </a:prstGeom>
+          <a:noFill/>
+        </p:spPr>
+        <p:txBody>
+          <a:bodyPr wrap="none" rtlCol="0">
+            <a:spAutoFit/>
+          </a:bodyPr>
+          <a:lstStyle/>
+          <a:p>
+            <a:r>
+              <a:rPr kumimoji="1" lang="ja-JP" altLang="en-US"/>
+              <a:t>図</a:t>
+            </a:r>
+            <a:r>
+              <a:rPr kumimoji="1" lang="en-US" altLang="ja-JP" dirty="0"/>
+              <a:t>4-1</a:t>
+            </a:r>
+            <a:r>
+              <a:rPr kumimoji="1" lang="ja-JP" altLang="en-US"/>
+              <a:t>　問題</a:t>
+            </a:r>
+            <a:r>
+              <a:rPr lang="en-US" altLang="ja-JP" dirty="0"/>
+              <a:t>4(1)</a:t>
+            </a:r>
+            <a:r>
+              <a:rPr lang="ja-JP" altLang="en-US"/>
+              <a:t>および</a:t>
+            </a:r>
+            <a:r>
+              <a:rPr lang="en-US" altLang="ja-JP" dirty="0"/>
+              <a:t>(2)</a:t>
+            </a:r>
+            <a:r>
+              <a:rPr lang="ja-JP" altLang="en-US"/>
+              <a:t>の実行結果</a:t>
+            </a:r>
+            <a:endParaRPr kumimoji="1" lang="ja-JP" altLang="en-US"/>
+          </a:p>
+        </p:txBody>
+      </p:sp>
+    </p:spTree>
+    <p:extLst>
+      <p:ext uri="{BB962C8B-B14F-4D97-AF65-F5344CB8AC3E}">
+        <p14:creationId xmlns:p14="http://schemas.microsoft.com/office/powerpoint/2010/main" val="3340995925"/>
+      </p:ext>
+    </p:extLst>
+  </p:cSld>
+  <p:clrMapOvr>
+    <a:masterClrMapping/>
+  </p:clrMapOvr>
+</p:sld>
+</file>
+
+<file path=ppt/slides/slide12.xml><?xml version="1.0" encoding="utf-8"?>
+<p:sld xmlns:a="http://schemas.openxmlformats.org/drawingml/2006/main" xmlns:r="http://schemas.openxmlformats.org/officeDocument/2006/relationships" xmlns:p="http://schemas.openxmlformats.org/presentationml/2006/main">
+  <p:cSld>
+    <p:spTree>
+      <p:nvGrpSpPr>
+        <p:cNvPr id="1" name=""/>
+        <p:cNvGrpSpPr/>
+        <p:nvPr/>
+      </p:nvGrpSpPr>
+      <p:grpSpPr>
+        <a:xfrm>
+          <a:off x="0" y="0"/>
+          <a:ext cx="0" cy="0"/>
+          <a:chOff x="0" y="0"/>
+          <a:chExt cx="0" cy="0"/>
+        </a:xfrm>
+      </p:grpSpPr>
+      <p:pic>
+        <p:nvPicPr>
+          <p:cNvPr id="3" name="図 2">
+            <a:extLst>
+              <a:ext uri="{FF2B5EF4-FFF2-40B4-BE49-F238E27FC236}">
                 <a16:creationId xmlns:a16="http://schemas.microsoft.com/office/drawing/2014/main" id="{0573E7E4-2B94-6CD3-4701-291561FB14CB}"/>
               </a:ext>
             </a:extLst>
@@ -3959,8 +4162,8 @@
           </a:fontRef>
         </p:style>
       </p:cxnSp>
-      <mc:AlternateContent xmlns:mc="http://schemas.openxmlformats.org/markup-compatibility/2006">
-        <mc:Choice xmlns:a14="http://schemas.microsoft.com/office/drawing/2010/main" Requires="a14">
+      <mc:AlternateContent xmlns:mc="http://schemas.openxmlformats.org/markup-compatibility/2006" xmlns:a14="http://schemas.microsoft.com/office/drawing/2010/main">
+        <mc:Choice Requires="a14">
           <p:sp>
             <p:nvSpPr>
               <p:cNvPr id="10" name="テキスト ボックス 9">
@@ -3989,6 +4192,7 @@
               </a:bodyPr>
               <a:lstStyle/>
               <a:p>
+                <a:pPr/>
                 <a14:m>
                   <m:oMathPara xmlns:m="http://schemas.openxmlformats.org/officeDocument/2006/math">
                     <m:oMathParaPr>
@@ -4015,7 +4219,7 @@
             </p:txBody>
           </p:sp>
         </mc:Choice>
-        <mc:Fallback>
+        <mc:Fallback xmlns="">
           <p:sp>
             <p:nvSpPr>
               <p:cNvPr id="10" name="テキスト ボックス 9">
@@ -4098,8 +4302,8 @@
           </a:fontRef>
         </p:style>
       </p:cxnSp>
-      <mc:AlternateContent xmlns:mc="http://schemas.openxmlformats.org/markup-compatibility/2006">
-        <mc:Choice xmlns:a14="http://schemas.microsoft.com/office/drawing/2010/main" Requires="a14">
+      <mc:AlternateContent xmlns:mc="http://schemas.openxmlformats.org/markup-compatibility/2006" xmlns:a14="http://schemas.microsoft.com/office/drawing/2010/main">
+        <mc:Choice Requires="a14">
           <p:sp>
             <p:nvSpPr>
               <p:cNvPr id="15" name="テキスト ボックス 14">
@@ -4128,6 +4332,7 @@
               </a:bodyPr>
               <a:lstStyle/>
               <a:p>
+                <a:pPr/>
                 <a14:m>
                   <m:oMathPara xmlns:m="http://schemas.openxmlformats.org/officeDocument/2006/math">
                     <m:oMathParaPr>
@@ -4154,7 +4359,7 @@
             </p:txBody>
           </p:sp>
         </mc:Choice>
-        <mc:Fallback>
+        <mc:Fallback xmlns="">
           <p:sp>
             <p:nvSpPr>
               <p:cNvPr id="15" name="テキスト ボックス 14">
@@ -4237,8 +4442,8 @@
           </a:fontRef>
         </p:style>
       </p:cxnSp>
-      <mc:AlternateContent xmlns:mc="http://schemas.openxmlformats.org/markup-compatibility/2006">
-        <mc:Choice xmlns:a14="http://schemas.microsoft.com/office/drawing/2010/main" Requires="a14">
+      <mc:AlternateContent xmlns:mc="http://schemas.openxmlformats.org/markup-compatibility/2006" xmlns:a14="http://schemas.microsoft.com/office/drawing/2010/main">
+        <mc:Choice Requires="a14">
           <p:sp>
             <p:nvSpPr>
               <p:cNvPr id="18" name="テキスト ボックス 17">
@@ -4267,6 +4472,7 @@
               </a:bodyPr>
               <a:lstStyle/>
               <a:p>
+                <a:pPr/>
                 <a14:m>
                   <m:oMathPara xmlns:m="http://schemas.openxmlformats.org/officeDocument/2006/math">
                     <m:oMathParaPr>
@@ -4293,7 +4499,7 @@
             </p:txBody>
           </p:sp>
         </mc:Choice>
-        <mc:Fallback>
+        <mc:Fallback xmlns="">
           <p:sp>
             <p:nvSpPr>
               <p:cNvPr id="18" name="テキスト ボックス 17">
@@ -4376,8 +4582,8 @@
           </a:fontRef>
         </p:style>
       </p:cxnSp>
-      <mc:AlternateContent xmlns:mc="http://schemas.openxmlformats.org/markup-compatibility/2006">
-        <mc:Choice xmlns:a14="http://schemas.microsoft.com/office/drawing/2010/main" Requires="a14">
+      <mc:AlternateContent xmlns:mc="http://schemas.openxmlformats.org/markup-compatibility/2006" xmlns:a14="http://schemas.microsoft.com/office/drawing/2010/main">
+        <mc:Choice Requires="a14">
           <p:sp>
             <p:nvSpPr>
               <p:cNvPr id="21" name="テキスト ボックス 20">
@@ -4406,6 +4612,7 @@
               </a:bodyPr>
               <a:lstStyle/>
               <a:p>
+                <a:pPr/>
                 <a14:m>
                   <m:oMathPara xmlns:m="http://schemas.openxmlformats.org/officeDocument/2006/math">
                     <m:oMathParaPr>
@@ -4432,7 +4639,7 @@
             </p:txBody>
           </p:sp>
         </mc:Choice>
-        <mc:Fallback>
+        <mc:Fallback xmlns="">
           <p:sp>
             <p:nvSpPr>
               <p:cNvPr id="21" name="テキスト ボックス 20">
@@ -4515,8 +4722,8 @@
           </a:fontRef>
         </p:style>
       </p:cxnSp>
-      <mc:AlternateContent xmlns:mc="http://schemas.openxmlformats.org/markup-compatibility/2006">
-        <mc:Choice xmlns:a14="http://schemas.microsoft.com/office/drawing/2010/main" Requires="a14">
+      <mc:AlternateContent xmlns:mc="http://schemas.openxmlformats.org/markup-compatibility/2006" xmlns:a14="http://schemas.microsoft.com/office/drawing/2010/main">
+        <mc:Choice Requires="a14">
           <p:sp>
             <p:nvSpPr>
               <p:cNvPr id="24" name="テキスト ボックス 23">
@@ -4545,6 +4752,7 @@
               </a:bodyPr>
               <a:lstStyle/>
               <a:p>
+                <a:pPr/>
                 <a14:m>
                   <m:oMathPara xmlns:m="http://schemas.openxmlformats.org/officeDocument/2006/math">
                     <m:oMathParaPr>
@@ -4571,7 +4779,7 @@
             </p:txBody>
           </p:sp>
         </mc:Choice>
-        <mc:Fallback>
+        <mc:Fallback xmlns="">
           <p:sp>
             <p:nvSpPr>
               <p:cNvPr id="24" name="テキスト ボックス 23">
@@ -4629,7 +4837,7 @@
 </p:sld>
 </file>
 
-<file path=ppt/slides/slide12.xml><?xml version="1.0" encoding="utf-8"?>
+<file path=ppt/slides/slide13.xml><?xml version="1.0" encoding="utf-8"?>
 <p:sld xmlns:a="http://schemas.openxmlformats.org/drawingml/2006/main" xmlns:r="http://schemas.openxmlformats.org/officeDocument/2006/relationships" xmlns:p="http://schemas.openxmlformats.org/presentationml/2006/main">
   <p:cSld>
     <p:spTree>
@@ -4803,8 +5011,8 @@
           </a:p>
         </p:txBody>
       </p:sp>
-      <mc:AlternateContent xmlns:mc="http://schemas.openxmlformats.org/markup-compatibility/2006">
-        <mc:Choice xmlns:a14="http://schemas.microsoft.com/office/drawing/2010/main" Requires="a14">
+      <mc:AlternateContent xmlns:mc="http://schemas.openxmlformats.org/markup-compatibility/2006" xmlns:a14="http://schemas.microsoft.com/office/drawing/2010/main">
+        <mc:Choice Requires="a14">
           <p:sp>
             <p:nvSpPr>
               <p:cNvPr id="8" name="テキスト ボックス 7">
@@ -4852,7 +5060,7 @@
             </p:txBody>
           </p:sp>
         </mc:Choice>
-        <mc:Fallback>
+        <mc:Fallback xmlns="">
           <p:sp>
             <p:nvSpPr>
               <p:cNvPr id="8" name="テキスト ボックス 7">
@@ -4973,8 +5181,8 @@
           </a:fontRef>
         </p:style>
       </p:cxnSp>
-      <mc:AlternateContent xmlns:mc="http://schemas.openxmlformats.org/markup-compatibility/2006">
-        <mc:Choice xmlns:a14="http://schemas.microsoft.com/office/drawing/2010/main" Requires="a14">
+      <mc:AlternateContent xmlns:mc="http://schemas.openxmlformats.org/markup-compatibility/2006" xmlns:a14="http://schemas.microsoft.com/office/drawing/2010/main">
+        <mc:Choice Requires="a14">
           <p:sp>
             <p:nvSpPr>
               <p:cNvPr id="13" name="テキスト ボックス 12">
@@ -5022,7 +5230,7 @@
             </p:txBody>
           </p:sp>
         </mc:Choice>
-        <mc:Fallback>
+        <mc:Fallback xmlns="">
           <p:sp>
             <p:nvSpPr>
               <p:cNvPr id="13" name="テキスト ボックス 12">
@@ -5067,8 +5275,8 @@
           </p:sp>
         </mc:Fallback>
       </mc:AlternateContent>
-      <mc:AlternateContent xmlns:mc="http://schemas.openxmlformats.org/markup-compatibility/2006">
-        <mc:Choice xmlns:a14="http://schemas.microsoft.com/office/drawing/2010/main" Requires="a14">
+      <mc:AlternateContent xmlns:mc="http://schemas.openxmlformats.org/markup-compatibility/2006" xmlns:a14="http://schemas.microsoft.com/office/drawing/2010/main">
+        <mc:Choice Requires="a14">
           <p:sp>
             <p:nvSpPr>
               <p:cNvPr id="14" name="テキスト ボックス 13">
@@ -5116,7 +5324,7 @@
             </p:txBody>
           </p:sp>
         </mc:Choice>
-        <mc:Fallback>
+        <mc:Fallback xmlns="">
           <p:sp>
             <p:nvSpPr>
               <p:cNvPr id="14" name="テキスト ボックス 13">
@@ -5161,8 +5369,8 @@
           </p:sp>
         </mc:Fallback>
       </mc:AlternateContent>
-      <mc:AlternateContent xmlns:mc="http://schemas.openxmlformats.org/markup-compatibility/2006">
-        <mc:Choice xmlns:a14="http://schemas.microsoft.com/office/drawing/2010/main" Requires="a14">
+      <mc:AlternateContent xmlns:mc="http://schemas.openxmlformats.org/markup-compatibility/2006" xmlns:a14="http://schemas.microsoft.com/office/drawing/2010/main">
+        <mc:Choice Requires="a14">
           <p:sp>
             <p:nvSpPr>
               <p:cNvPr id="15" name="テキスト ボックス 14">
@@ -5210,7 +5418,7 @@
             </p:txBody>
           </p:sp>
         </mc:Choice>
-        <mc:Fallback>
+        <mc:Fallback xmlns="">
           <p:sp>
             <p:nvSpPr>
               <p:cNvPr id="15" name="テキスト ボックス 14">
@@ -5255,8 +5463,8 @@
           </p:sp>
         </mc:Fallback>
       </mc:AlternateContent>
-      <mc:AlternateContent xmlns:mc="http://schemas.openxmlformats.org/markup-compatibility/2006">
-        <mc:Choice xmlns:a14="http://schemas.microsoft.com/office/drawing/2010/main" Requires="a14">
+      <mc:AlternateContent xmlns:mc="http://schemas.openxmlformats.org/markup-compatibility/2006" xmlns:a14="http://schemas.microsoft.com/office/drawing/2010/main">
+        <mc:Choice Requires="a14">
           <p:sp>
             <p:nvSpPr>
               <p:cNvPr id="16" name="テキスト ボックス 15">
@@ -5304,7 +5512,7 @@
             </p:txBody>
           </p:sp>
         </mc:Choice>
-        <mc:Fallback>
+        <mc:Fallback xmlns="">
           <p:sp>
             <p:nvSpPr>
               <p:cNvPr id="16" name="テキスト ボックス 15">
@@ -5468,6 +5676,125 @@
     <p:extLst>
       <p:ext uri="{BB962C8B-B14F-4D97-AF65-F5344CB8AC3E}">
         <p14:creationId xmlns:p14="http://schemas.microsoft.com/office/powerpoint/2010/main" val="3165368094"/>
+      </p:ext>
+    </p:extLst>
+  </p:cSld>
+  <p:clrMapOvr>
+    <a:masterClrMapping/>
+  </p:clrMapOvr>
+</p:sld>
+</file>
+
+<file path=ppt/slides/slide14.xml><?xml version="1.0" encoding="utf-8"?>
+<p:sld xmlns:a="http://schemas.openxmlformats.org/drawingml/2006/main" xmlns:r="http://schemas.openxmlformats.org/officeDocument/2006/relationships" xmlns:p="http://schemas.openxmlformats.org/presentationml/2006/main">
+  <p:cSld>
+    <p:spTree>
+      <p:nvGrpSpPr>
+        <p:cNvPr id="1" name=""/>
+        <p:cNvGrpSpPr/>
+        <p:nvPr/>
+      </p:nvGrpSpPr>
+      <p:grpSpPr>
+        <a:xfrm>
+          <a:off x="0" y="0"/>
+          <a:ext cx="0" cy="0"/>
+          <a:chOff x="0" y="0"/>
+          <a:chExt cx="0" cy="0"/>
+        </a:xfrm>
+      </p:grpSpPr>
+      <p:pic>
+        <p:nvPicPr>
+          <p:cNvPr id="3" name="図 2">
+            <a:extLst>
+              <a:ext uri="{FF2B5EF4-FFF2-40B4-BE49-F238E27FC236}">
+                <a16:creationId xmlns:a16="http://schemas.microsoft.com/office/drawing/2014/main" id="{0E315FD2-9FCB-C015-3920-091290F996BD}"/>
+              </a:ext>
+            </a:extLst>
+          </p:cNvPr>
+          <p:cNvPicPr>
+            <a:picLocks noChangeAspect="1"/>
+          </p:cNvPicPr>
+          <p:nvPr/>
+        </p:nvPicPr>
+        <p:blipFill>
+          <a:blip r:embed="rId2"/>
+          <a:stretch>
+            <a:fillRect/>
+          </a:stretch>
+        </p:blipFill>
+        <p:spPr>
+          <a:xfrm>
+            <a:off x="3943350" y="850900"/>
+            <a:ext cx="4305300" cy="5156200"/>
+          </a:xfrm>
+          <a:prstGeom prst="rect">
+            <a:avLst/>
+          </a:prstGeom>
+        </p:spPr>
+      </p:pic>
+      <p:sp>
+        <p:nvSpPr>
+          <p:cNvPr id="4" name="テキスト ボックス 3">
+            <a:extLst>
+              <a:ext uri="{FF2B5EF4-FFF2-40B4-BE49-F238E27FC236}">
+                <a16:creationId xmlns:a16="http://schemas.microsoft.com/office/drawing/2014/main" id="{331C5AB1-E5DD-8EA2-A7F1-6E3E4E721A8A}"/>
+              </a:ext>
+            </a:extLst>
+          </p:cNvPr>
+          <p:cNvSpPr txBox="1"/>
+          <p:nvPr/>
+        </p:nvSpPr>
+        <p:spPr>
+          <a:xfrm>
+            <a:off x="3943350" y="6007100"/>
+            <a:ext cx="4471096" cy="369332"/>
+          </a:xfrm>
+          <a:prstGeom prst="rect">
+            <a:avLst/>
+          </a:prstGeom>
+          <a:noFill/>
+        </p:spPr>
+        <p:txBody>
+          <a:bodyPr wrap="none" rtlCol="0">
+            <a:spAutoFit/>
+          </a:bodyPr>
+          <a:lstStyle/>
+          <a:p>
+            <a:r>
+              <a:rPr kumimoji="1" lang="ja-JP" altLang="en-US"/>
+              <a:t>図</a:t>
+            </a:r>
+            <a:r>
+              <a:rPr kumimoji="1" lang="en-US" altLang="ja-JP" dirty="0"/>
+              <a:t>5</a:t>
+            </a:r>
+            <a:r>
+              <a:rPr kumimoji="1" lang="ja-JP" altLang="en-US"/>
+              <a:t>　問題</a:t>
+            </a:r>
+            <a:r>
+              <a:rPr kumimoji="1" lang="en-US" altLang="ja-JP" dirty="0"/>
+              <a:t>5</a:t>
+            </a:r>
+            <a:r>
+              <a:rPr kumimoji="1" lang="ja-JP" altLang="en-US"/>
+              <a:t>での</a:t>
+            </a:r>
+            <a:r>
+              <a:rPr kumimoji="1" lang="en-US" altLang="ja-JP" dirty="0"/>
+              <a:t>5~200</a:t>
+            </a:r>
+            <a:r>
+              <a:rPr kumimoji="1" lang="ja-JP" altLang="en-US"/>
+              <a:t>行までの実行結果</a:t>
+            </a:r>
+          </a:p>
+        </p:txBody>
+      </p:sp>
+    </p:spTree>
+    <p:extLst>
+      <p:ext uri="{BB962C8B-B14F-4D97-AF65-F5344CB8AC3E}">
+        <p14:creationId xmlns:p14="http://schemas.microsoft.com/office/powerpoint/2010/main" val="1595553752"/>
       </p:ext>
     </p:extLst>
   </p:cSld>

--- a/latex/lec5/report_2412747_5.pptx
+++ b/latex/lec5/report_2412747_5.pptx
@@ -19,6 +19,7 @@
     <p:sldId id="267" r:id="rId13"/>
     <p:sldId id="268" r:id="rId14"/>
     <p:sldId id="270" r:id="rId15"/>
+    <p:sldId id="271" r:id="rId16"/>
   </p:sldIdLst>
   <p:sldSz cx="12192000" cy="6858000"/>
   <p:notesSz cx="6858000" cy="9144000"/>
@@ -5804,6 +5805,117 @@
 </p:sld>
 </file>
 
+<file path=ppt/slides/slide15.xml><?xml version="1.0" encoding="utf-8"?>
+<p:sld xmlns:a="http://schemas.openxmlformats.org/drawingml/2006/main" xmlns:r="http://schemas.openxmlformats.org/officeDocument/2006/relationships" xmlns:p="http://schemas.openxmlformats.org/presentationml/2006/main">
+  <p:cSld>
+    <p:spTree>
+      <p:nvGrpSpPr>
+        <p:cNvPr id="1" name=""/>
+        <p:cNvGrpSpPr/>
+        <p:nvPr/>
+      </p:nvGrpSpPr>
+      <p:grpSpPr>
+        <a:xfrm>
+          <a:off x="0" y="0"/>
+          <a:ext cx="0" cy="0"/>
+          <a:chOff x="0" y="0"/>
+          <a:chExt cx="0" cy="0"/>
+        </a:xfrm>
+      </p:grpSpPr>
+      <p:pic>
+        <p:nvPicPr>
+          <p:cNvPr id="3" name="図 2">
+            <a:extLst>
+              <a:ext uri="{FF2B5EF4-FFF2-40B4-BE49-F238E27FC236}">
+                <a16:creationId xmlns:a16="http://schemas.microsoft.com/office/drawing/2014/main" id="{4F790CD6-58C2-4010-5084-F21B9523E362}"/>
+              </a:ext>
+            </a:extLst>
+          </p:cNvPr>
+          <p:cNvPicPr>
+            <a:picLocks noChangeAspect="1"/>
+          </p:cNvPicPr>
+          <p:nvPr/>
+        </p:nvPicPr>
+        <p:blipFill>
+          <a:blip r:embed="rId2"/>
+          <a:stretch>
+            <a:fillRect/>
+          </a:stretch>
+        </p:blipFill>
+        <p:spPr>
+          <a:xfrm>
+            <a:off x="4083050" y="2457450"/>
+            <a:ext cx="4025900" cy="1943100"/>
+          </a:xfrm>
+          <a:prstGeom prst="rect">
+            <a:avLst/>
+          </a:prstGeom>
+        </p:spPr>
+      </p:pic>
+      <p:sp>
+        <p:nvSpPr>
+          <p:cNvPr id="4" name="テキスト ボックス 3">
+            <a:extLst>
+              <a:ext uri="{FF2B5EF4-FFF2-40B4-BE49-F238E27FC236}">
+                <a16:creationId xmlns:a16="http://schemas.microsoft.com/office/drawing/2014/main" id="{FD3BEBB5-26AD-4935-5316-973C2F621922}"/>
+              </a:ext>
+            </a:extLst>
+          </p:cNvPr>
+          <p:cNvSpPr txBox="1"/>
+          <p:nvPr/>
+        </p:nvSpPr>
+        <p:spPr>
+          <a:xfrm>
+            <a:off x="4836681" y="4400550"/>
+            <a:ext cx="2518638" cy="369332"/>
+          </a:xfrm>
+          <a:prstGeom prst="rect">
+            <a:avLst/>
+          </a:prstGeom>
+          <a:noFill/>
+        </p:spPr>
+        <p:txBody>
+          <a:bodyPr wrap="none" rtlCol="0">
+            <a:spAutoFit/>
+          </a:bodyPr>
+          <a:lstStyle/>
+          <a:p>
+            <a:r>
+              <a:rPr kumimoji="1" lang="ja-JP" altLang="en-US"/>
+              <a:t>図</a:t>
+            </a:r>
+            <a:r>
+              <a:rPr kumimoji="1" lang="en-US" altLang="ja-JP" dirty="0"/>
+              <a:t>6</a:t>
+            </a:r>
+            <a:r>
+              <a:rPr kumimoji="1" lang="ja-JP" altLang="en-US"/>
+              <a:t>　問題</a:t>
+            </a:r>
+            <a:r>
+              <a:rPr kumimoji="1" lang="en-US" altLang="ja-JP" dirty="0"/>
+              <a:t>6</a:t>
+            </a:r>
+            <a:r>
+              <a:rPr kumimoji="1" lang="ja-JP" altLang="en-US"/>
+              <a:t>の実行結果</a:t>
+            </a:r>
+          </a:p>
+        </p:txBody>
+      </p:sp>
+    </p:spTree>
+    <p:extLst>
+      <p:ext uri="{BB962C8B-B14F-4D97-AF65-F5344CB8AC3E}">
+        <p14:creationId xmlns:p14="http://schemas.microsoft.com/office/powerpoint/2010/main" val="1089124241"/>
+      </p:ext>
+    </p:extLst>
+  </p:cSld>
+  <p:clrMapOvr>
+    <a:masterClrMapping/>
+  </p:clrMapOvr>
+</p:sld>
+</file>
+
 <file path=ppt/slides/slide2.xml><?xml version="1.0" encoding="utf-8"?>
 <p:sld xmlns:a="http://schemas.openxmlformats.org/drawingml/2006/main" xmlns:r="http://schemas.openxmlformats.org/officeDocument/2006/relationships" xmlns:p="http://schemas.openxmlformats.org/presentationml/2006/main">
   <p:cSld>
